--- a/data-eng/decks/w5d2s2.pptx
+++ b/data-eng/decks/w5d2s2.pptx
@@ -3100,7 +3100,7 @@
       <p:grpSpPr/>
       <p:sp>
         <p:nvSpPr>
-          <p:cNvPr id="2" name="Oval 1"/>
+          <p:cNvPr id="2" name="deckgen:decor"/>
           <p:cNvSpPr/>
           <p:nvPr/>
         </p:nvSpPr>
@@ -3130,7 +3130,7 @@
       </p:sp>
       <p:sp>
         <p:nvSpPr>
-          <p:cNvPr id="3" name="Oval 2"/>
+          <p:cNvPr id="3" name="deckgen:decor"/>
           <p:cNvSpPr/>
           <p:nvPr/>
         </p:nvSpPr>
@@ -3160,7 +3160,7 @@
       </p:sp>
       <p:sp>
         <p:nvSpPr>
-          <p:cNvPr id="4" name="Oval 3"/>
+          <p:cNvPr id="4" name="deckgen:decor"/>
           <p:cNvSpPr/>
           <p:nvPr/>
         </p:nvSpPr>
@@ -3190,7 +3190,7 @@
       </p:sp>
       <p:sp>
         <p:nvSpPr>
-          <p:cNvPr id="5" name="Rectangle 4"/>
+          <p:cNvPr id="5" name="deckgen:decor"/>
           <p:cNvSpPr/>
           <p:nvPr/>
         </p:nvSpPr>
@@ -3220,7 +3220,7 @@
       </p:sp>
       <p:sp>
         <p:nvSpPr>
-          <p:cNvPr id="6" name="Oval 5"/>
+          <p:cNvPr id="6" name="deckgen:decor"/>
           <p:cNvSpPr/>
           <p:nvPr/>
         </p:nvSpPr>
@@ -3250,7 +3250,7 @@
       </p:sp>
       <p:sp>
         <p:nvSpPr>
-          <p:cNvPr id="7" name="Oval 6"/>
+          <p:cNvPr id="7" name="deckgen:decor"/>
           <p:cNvSpPr/>
           <p:nvPr/>
         </p:nvSpPr>
@@ -3280,7 +3280,7 @@
       </p:sp>
       <p:sp>
         <p:nvSpPr>
-          <p:cNvPr id="8" name="Oval 7"/>
+          <p:cNvPr id="8" name="deckgen:decor"/>
           <p:cNvSpPr/>
           <p:nvPr/>
         </p:nvSpPr>
@@ -3310,7 +3310,7 @@
       </p:sp>
       <p:sp>
         <p:nvSpPr>
-          <p:cNvPr id="9" name="Oval 8"/>
+          <p:cNvPr id="9" name="deckgen:decor"/>
           <p:cNvSpPr/>
           <p:nvPr/>
         </p:nvSpPr>
@@ -3340,7 +3340,7 @@
       </p:sp>
       <p:sp>
         <p:nvSpPr>
-          <p:cNvPr id="10" name="Rectangle 9"/>
+          <p:cNvPr id="10" name="deckgen:decor"/>
           <p:cNvSpPr/>
           <p:nvPr/>
         </p:nvSpPr>
@@ -3618,7 +3618,7 @@
       <p:grpSpPr/>
       <p:sp>
         <p:nvSpPr>
-          <p:cNvPr id="2" name="Oval 1"/>
+          <p:cNvPr id="2" name="deckgen:decor"/>
           <p:cNvSpPr/>
           <p:nvPr/>
         </p:nvSpPr>
@@ -3648,7 +3648,7 @@
       </p:sp>
       <p:sp>
         <p:nvSpPr>
-          <p:cNvPr id="3" name="Oval 2"/>
+          <p:cNvPr id="3" name="deckgen:decor"/>
           <p:cNvSpPr/>
           <p:nvPr/>
         </p:nvSpPr>
@@ -3678,7 +3678,7 @@
       </p:sp>
       <p:sp>
         <p:nvSpPr>
-          <p:cNvPr id="4" name="Oval 3"/>
+          <p:cNvPr id="4" name="deckgen:decor"/>
           <p:cNvSpPr/>
           <p:nvPr/>
         </p:nvSpPr>
@@ -3826,12 +3826,12 @@
         </p:nvSpPr>
         <p:spPr>
           <a:xfrm>
-            <a:off x="1143000" y="2867025"/>
-            <a:ext cx="16002000" cy="742950"/>
+            <a:off x="1143000" y="2990850"/>
+            <a:ext cx="16002000" cy="819150"/>
           </a:xfrm>
           <a:prstGeom prst="roundRect">
             <a:avLst>
-              <a:gd name="adj" fmla="val 6410"/>
+              <a:gd name="adj" fmla="val 5813"/>
             </a:avLst>
           </a:prstGeom>
           <a:solidFill>
@@ -3860,7 +3860,7 @@
         </p:nvSpPr>
         <p:spPr>
           <a:xfrm>
-            <a:off x="1390650" y="2971800"/>
+            <a:off x="1390650" y="3133725"/>
             <a:ext cx="533400" cy="533400"/>
           </a:xfrm>
           <a:prstGeom prst="ellipse">
@@ -3890,7 +3890,7 @@
         </p:nvSpPr>
         <p:spPr>
           <a:xfrm>
-            <a:off x="1390650" y="3095625"/>
+            <a:off x="1390650" y="3257550"/>
             <a:ext cx="533400" cy="323850"/>
           </a:xfrm>
           <a:prstGeom prst="rect">
@@ -3931,8 +3931,8 @@
         </p:nvSpPr>
         <p:spPr>
           <a:xfrm>
-            <a:off x="2190750" y="2867025"/>
-            <a:ext cx="14573250" cy="742950"/>
+            <a:off x="2190750" y="2990850"/>
+            <a:ext cx="14573250" cy="819150"/>
           </a:xfrm>
           <a:prstGeom prst="rect">
             <a:avLst/>
@@ -3951,7 +3951,7 @@
               </a:lnSpc>
             </a:pPr>
             <a:r>
-              <a:rPr sz="2100" b="1">
+              <a:rPr sz="2325" b="1">
                 <a:solidFill>
                   <a:srgbClr val="0D2B5E"/>
                 </a:solidFill>
@@ -3959,7 +3959,7 @@
                 <a:ea typeface="Pretendard"/>
                 <a:cs typeface="Pretendard"/>
               </a:rPr>
-              <a:t>docker ps 에 8080 을 쓰는 컨테이너가 없다</a:t>
+              <a:t>docker compose ps 에 마스터 1 · 워커 2 가 모두 Up 이다</a:t>
             </a:r>
           </a:p>
         </p:txBody>
@@ -3972,12 +3972,12 @@
         </p:nvSpPr>
         <p:spPr>
           <a:xfrm>
-            <a:off x="1143000" y="3724275"/>
-            <a:ext cx="16002000" cy="742950"/>
+            <a:off x="1143000" y="3981450"/>
+            <a:ext cx="16002000" cy="819150"/>
           </a:xfrm>
           <a:prstGeom prst="roundRect">
             <a:avLst>
-              <a:gd name="adj" fmla="val 6410"/>
+              <a:gd name="adj" fmla="val 5813"/>
             </a:avLst>
           </a:prstGeom>
           <a:solidFill>
@@ -4006,7 +4006,7 @@
         </p:nvSpPr>
         <p:spPr>
           <a:xfrm>
-            <a:off x="1390650" y="3829050"/>
+            <a:off x="1390650" y="4124325"/>
             <a:ext cx="533400" cy="533400"/>
           </a:xfrm>
           <a:prstGeom prst="ellipse">
@@ -4036,7 +4036,7 @@
         </p:nvSpPr>
         <p:spPr>
           <a:xfrm>
-            <a:off x="1390650" y="3952875"/>
+            <a:off x="1390650" y="4248150"/>
             <a:ext cx="533400" cy="323850"/>
           </a:xfrm>
           <a:prstGeom prst="rect">
@@ -4077,8 +4077,8 @@
         </p:nvSpPr>
         <p:spPr>
           <a:xfrm>
-            <a:off x="2190750" y="3724275"/>
-            <a:ext cx="14573250" cy="742950"/>
+            <a:off x="2190750" y="3981450"/>
+            <a:ext cx="14573250" cy="819150"/>
           </a:xfrm>
           <a:prstGeom prst="rect">
             <a:avLst/>
@@ -4097,7 +4097,7 @@
               </a:lnSpc>
             </a:pPr>
             <a:r>
-              <a:rPr sz="2100" b="1">
+              <a:rPr sz="2325" b="1">
                 <a:solidFill>
                   <a:srgbClr val="0D2B5E"/>
                 </a:solidFill>
@@ -4105,7 +4105,7 @@
                 <a:ea typeface="Pretendard"/>
                 <a:cs typeface="Pretendard"/>
               </a:rPr>
-              <a:t>docker compose ps 에 spark-master 1개와 워커가 모두 Up 이다</a:t>
+              <a:t>워커 로그에 Successfully registered with master 가 있다</a:t>
             </a:r>
           </a:p>
         </p:txBody>
@@ -4118,12 +4118,12 @@
         </p:nvSpPr>
         <p:spPr>
           <a:xfrm>
-            <a:off x="1143000" y="4581525"/>
-            <a:ext cx="16002000" cy="742950"/>
+            <a:off x="1143000" y="4972050"/>
+            <a:ext cx="16002000" cy="819150"/>
           </a:xfrm>
           <a:prstGeom prst="roundRect">
             <a:avLst>
-              <a:gd name="adj" fmla="val 6410"/>
+              <a:gd name="adj" fmla="val 5813"/>
             </a:avLst>
           </a:prstGeom>
           <a:solidFill>
@@ -4152,7 +4152,7 @@
         </p:nvSpPr>
         <p:spPr>
           <a:xfrm>
-            <a:off x="1390650" y="4686300"/>
+            <a:off x="1390650" y="5114925"/>
             <a:ext cx="533400" cy="533400"/>
           </a:xfrm>
           <a:prstGeom prst="ellipse">
@@ -4182,7 +4182,7 @@
         </p:nvSpPr>
         <p:spPr>
           <a:xfrm>
-            <a:off x="1390650" y="4810125"/>
+            <a:off x="1390650" y="5238750"/>
             <a:ext cx="533400" cy="323850"/>
           </a:xfrm>
           <a:prstGeom prst="rect">
@@ -4223,8 +4223,8 @@
         </p:nvSpPr>
         <p:spPr>
           <a:xfrm>
-            <a:off x="2190750" y="4581525"/>
-            <a:ext cx="14573250" cy="742950"/>
+            <a:off x="2190750" y="4972050"/>
+            <a:ext cx="14573250" cy="819150"/>
           </a:xfrm>
           <a:prstGeom prst="rect">
             <a:avLst/>
@@ -4243,7 +4243,7 @@
               </a:lnSpc>
             </a:pPr>
             <a:r>
-              <a:rPr sz="2100" b="1">
+              <a:rPr sz="2325" b="1">
                 <a:solidFill>
                   <a:srgbClr val="0D2B5E"/>
                 </a:solidFill>
@@ -4251,7 +4251,7 @@
                 <a:ea typeface="Pretendard"/>
                 <a:cs typeface="Pretendard"/>
               </a:rPr>
-              <a:t>워커 로그에 Successfully registered with master 가 있다</a:t>
+              <a:t>UI 가 Alive Workers 2 · Cores 4 Total, 0 Used 다</a:t>
             </a:r>
           </a:p>
         </p:txBody>
@@ -4264,12 +4264,12 @@
         </p:nvSpPr>
         <p:spPr>
           <a:xfrm>
-            <a:off x="1143000" y="5438775"/>
-            <a:ext cx="16002000" cy="742950"/>
+            <a:off x="1143000" y="5962650"/>
+            <a:ext cx="16002000" cy="819150"/>
           </a:xfrm>
           <a:prstGeom prst="roundRect">
             <a:avLst>
-              <a:gd name="adj" fmla="val 6410"/>
+              <a:gd name="adj" fmla="val 5813"/>
             </a:avLst>
           </a:prstGeom>
           <a:solidFill>
@@ -4298,7 +4298,7 @@
         </p:nvSpPr>
         <p:spPr>
           <a:xfrm>
-            <a:off x="1390650" y="5543550"/>
+            <a:off x="1390650" y="6105525"/>
             <a:ext cx="533400" cy="533400"/>
           </a:xfrm>
           <a:prstGeom prst="ellipse">
@@ -4328,7 +4328,7 @@
         </p:nvSpPr>
         <p:spPr>
           <a:xfrm>
-            <a:off x="1390650" y="5667375"/>
+            <a:off x="1390650" y="6229350"/>
             <a:ext cx="533400" cy="323850"/>
           </a:xfrm>
           <a:prstGeom prst="rect">
@@ -4369,8 +4369,8 @@
         </p:nvSpPr>
         <p:spPr>
           <a:xfrm>
-            <a:off x="2190750" y="5438775"/>
-            <a:ext cx="14573250" cy="742950"/>
+            <a:off x="2190750" y="5962650"/>
+            <a:ext cx="14573250" cy="819150"/>
           </a:xfrm>
           <a:prstGeom prst="rect">
             <a:avLst/>
@@ -4389,7 +4389,7 @@
               </a:lnSpc>
             </a:pPr>
             <a:r>
-              <a:rPr sz="2100" b="1">
+              <a:rPr sz="2325" b="1">
                 <a:solidFill>
                   <a:srgbClr val="0D2B5E"/>
                 </a:solidFill>
@@ -4397,7 +4397,7 @@
                 <a:ea typeface="Pretendard"/>
                 <a:cs typeface="Pretendard"/>
               </a:rPr>
-              <a:t>마스터 UI Workers 표에 워커가 ALIVE 로 보인다</a:t>
+              <a:t>줄인 뒤 지운 워커는 DEAD 로 남고, hostname 은 서로 다르다</a:t>
             </a:r>
           </a:p>
         </p:txBody>
@@ -4410,12 +4410,12 @@
         </p:nvSpPr>
         <p:spPr>
           <a:xfrm>
-            <a:off x="1143000" y="6296025"/>
-            <a:ext cx="16002000" cy="742950"/>
+            <a:off x="1143000" y="6953250"/>
+            <a:ext cx="16002000" cy="819150"/>
           </a:xfrm>
           <a:prstGeom prst="roundRect">
             <a:avLst>
-              <a:gd name="adj" fmla="val 6410"/>
+              <a:gd name="adj" fmla="val 5813"/>
             </a:avLst>
           </a:prstGeom>
           <a:solidFill>
@@ -4444,7 +4444,7 @@
         </p:nvSpPr>
         <p:spPr>
           <a:xfrm>
-            <a:off x="1390650" y="6400800"/>
+            <a:off x="1390650" y="7096125"/>
             <a:ext cx="533400" cy="533400"/>
           </a:xfrm>
           <a:prstGeom prst="ellipse">
@@ -4474,7 +4474,7 @@
         </p:nvSpPr>
         <p:spPr>
           <a:xfrm>
-            <a:off x="1390650" y="6524625"/>
+            <a:off x="1390650" y="7219950"/>
             <a:ext cx="533400" cy="323850"/>
           </a:xfrm>
           <a:prstGeom prst="rect">
@@ -4515,8 +4515,8 @@
         </p:nvSpPr>
         <p:spPr>
           <a:xfrm>
-            <a:off x="2190750" y="6296025"/>
-            <a:ext cx="14573250" cy="742950"/>
+            <a:off x="2190750" y="6953250"/>
+            <a:ext cx="14573250" cy="819150"/>
           </a:xfrm>
           <a:prstGeom prst="rect">
             <a:avLst/>
@@ -4535,7 +4535,7 @@
               </a:lnSpc>
             </a:pPr>
             <a:r>
-              <a:rPr sz="2100" b="1">
+              <a:rPr sz="2325" b="1">
                 <a:solidFill>
                   <a:srgbClr val="0D2B5E"/>
                 </a:solidFill>
@@ -4543,61 +4543,27 @@
                 <a:ea typeface="Pretendard"/>
                 <a:cs typeface="Pretendard"/>
               </a:rPr>
-              <a:t>--scale 뒤 Workers 수와 Cores in use 가 따라 바뀐다</a:t>
-            </a:r>
-          </a:p>
-        </p:txBody>
-      </p:sp>
-      <p:sp>
-        <p:nvSpPr>
-          <p:cNvPr id="28" name="Rounded Rectangle 27"/>
-          <p:cNvSpPr/>
-          <p:nvPr/>
-        </p:nvSpPr>
-        <p:spPr>
-          <a:xfrm>
-            <a:off x="1143000" y="7153275"/>
-            <a:ext cx="16002000" cy="742950"/>
-          </a:xfrm>
-          <a:prstGeom prst="roundRect">
-            <a:avLst>
-              <a:gd name="adj" fmla="val 6410"/>
-            </a:avLst>
-          </a:prstGeom>
-          <a:solidFill>
-            <a:srgbClr val="FAFBFD"/>
-          </a:solidFill>
-          <a:ln w="9525">
-            <a:solidFill>
-              <a:srgbClr val="DCE1E8"/>
-            </a:solidFill>
-          </a:ln>
-          <a:effectLst/>
-        </p:spPr>
-        <p:txBody>
-          <a:bodyPr rtlCol="0" anchor="ctr" wrap="square"/>
-          <a:lstStyle/>
-          <a:p>
-            <a:pPr algn="ctr"/>
-          </a:p>
-        </p:txBody>
-      </p:sp>
-      <p:sp>
-        <p:nvSpPr>
-          <p:cNvPr id="29" name="Oval 28"/>
-          <p:cNvSpPr/>
-          <p:nvPr/>
-        </p:nvSpPr>
-        <p:spPr>
-          <a:xfrm>
-            <a:off x="1390650" y="7258050"/>
-            <a:ext cx="533400" cy="533400"/>
-          </a:xfrm>
-          <a:prstGeom prst="ellipse">
-            <a:avLst/>
-          </a:prstGeom>
-          <a:solidFill>
-            <a:srgbClr val="0D2B5E"/>
+              <a:t>마스터가 꺼진 동안은 새 잡을 못 낸다 — 그래서 운영은 HA</a:t>
+            </a:r>
+          </a:p>
+        </p:txBody>
+      </p:sp>
+      <p:sp>
+        <p:nvSpPr>
+          <p:cNvPr id="28" name="Rectangle 27"/>
+          <p:cNvSpPr/>
+          <p:nvPr/>
+        </p:nvSpPr>
+        <p:spPr>
+          <a:xfrm>
+            <a:off x="1143000" y="8058150"/>
+            <a:ext cx="16002000" cy="9525"/>
+          </a:xfrm>
+          <a:prstGeom prst="rect">
+            <a:avLst/>
+          </a:prstGeom>
+          <a:solidFill>
+            <a:srgbClr val="DCE1E8"/>
           </a:solidFill>
           <a:ln>
             <a:noFill/>
@@ -4614,119 +4580,7 @@
       </p:sp>
       <p:sp>
         <p:nvSpPr>
-          <p:cNvPr id="30" name="TextBox 29"/>
-          <p:cNvSpPr txBox="1"/>
-          <p:nvPr/>
-        </p:nvSpPr>
-        <p:spPr>
-          <a:xfrm>
-            <a:off x="1390650" y="7381875"/>
-            <a:ext cx="533400" cy="323850"/>
-          </a:xfrm>
-          <a:prstGeom prst="rect">
-            <a:avLst/>
-          </a:prstGeom>
-          <a:noFill/>
-        </p:spPr>
-        <p:txBody>
-          <a:bodyPr wrap="square" lIns="0" rIns="0" tIns="0" bIns="0" anchor="t">
-            <a:spAutoFit/>
-          </a:bodyPr>
-          <a:lstStyle/>
-          <a:p>
-            <a:pPr algn="ctr">
-              <a:lnSpc>
-                <a:spcPct val="100000"/>
-              </a:lnSpc>
-            </a:pPr>
-            <a:r>
-              <a:rPr sz="2100" b="1">
-                <a:solidFill>
-                  <a:srgbClr val="FFFFFF"/>
-                </a:solidFill>
-                <a:latin typeface="Pretendard"/>
-                <a:ea typeface="Pretendard"/>
-                <a:cs typeface="Pretendard"/>
-              </a:rPr>
-              <a:t>6</a:t>
-            </a:r>
-          </a:p>
-        </p:txBody>
-      </p:sp>
-      <p:sp>
-        <p:nvSpPr>
-          <p:cNvPr id="31" name="TextBox 30"/>
-          <p:cNvSpPr txBox="1"/>
-          <p:nvPr/>
-        </p:nvSpPr>
-        <p:spPr>
-          <a:xfrm>
-            <a:off x="2190750" y="7153275"/>
-            <a:ext cx="14573250" cy="742950"/>
-          </a:xfrm>
-          <a:prstGeom prst="rect">
-            <a:avLst/>
-          </a:prstGeom>
-          <a:noFill/>
-        </p:spPr>
-        <p:txBody>
-          <a:bodyPr wrap="square" lIns="0" rIns="0" tIns="0" bIns="0" anchor="ctr">
-            <a:spAutoFit/>
-          </a:bodyPr>
-          <a:lstStyle/>
-          <a:p>
-            <a:pPr algn="l">
-              <a:lnSpc>
-                <a:spcPct val="100000"/>
-              </a:lnSpc>
-            </a:pPr>
-            <a:r>
-              <a:rPr sz="2100" b="1">
-                <a:solidFill>
-                  <a:srgbClr val="0D2B5E"/>
-                </a:solidFill>
-                <a:latin typeface="Pretendard"/>
-                <a:ea typeface="Pretendard"/>
-                <a:cs typeface="Pretendard"/>
-              </a:rPr>
-              <a:t>마스터와 워커들의 hostname 이 서로 다르다</a:t>
-            </a:r>
-          </a:p>
-        </p:txBody>
-      </p:sp>
-      <p:sp>
-        <p:nvSpPr>
-          <p:cNvPr id="32" name="Rectangle 31"/>
-          <p:cNvSpPr/>
-          <p:nvPr/>
-        </p:nvSpPr>
-        <p:spPr>
-          <a:xfrm>
-            <a:off x="1143000" y="8058150"/>
-            <a:ext cx="16002000" cy="9525"/>
-          </a:xfrm>
-          <a:prstGeom prst="rect">
-            <a:avLst/>
-          </a:prstGeom>
-          <a:solidFill>
-            <a:srgbClr val="DCE1E8"/>
-          </a:solidFill>
-          <a:ln>
-            <a:noFill/>
-          </a:ln>
-          <a:effectLst/>
-        </p:spPr>
-        <p:txBody>
-          <a:bodyPr rtlCol="0" anchor="ctr" wrap="square"/>
-          <a:lstStyle/>
-          <a:p>
-            <a:pPr algn="ctr"/>
-          </a:p>
-        </p:txBody>
-      </p:sp>
-      <p:sp>
-        <p:nvSpPr>
-          <p:cNvPr id="33" name="TextBox 32"/>
+          <p:cNvPr id="29" name="TextBox 28"/>
           <p:cNvSpPr txBox="1"/>
           <p:nvPr/>
         </p:nvSpPr>
@@ -4767,7 +4621,7 @@
       </p:sp>
       <p:sp>
         <p:nvSpPr>
-          <p:cNvPr id="34" name="TextBox 33"/>
+          <p:cNvPr id="30" name="TextBox 29"/>
           <p:cNvSpPr txBox="1"/>
           <p:nvPr/>
         </p:nvSpPr>
@@ -4826,7 +4680,7 @@
       <p:grpSpPr/>
       <p:sp>
         <p:nvSpPr>
-          <p:cNvPr id="2" name="Oval 1"/>
+          <p:cNvPr id="2" name="deckgen:decor"/>
           <p:cNvSpPr/>
           <p:nvPr/>
         </p:nvSpPr>
@@ -4856,7 +4710,7 @@
       </p:sp>
       <p:sp>
         <p:nvSpPr>
-          <p:cNvPr id="3" name="Oval 2"/>
+          <p:cNvPr id="3" name="deckgen:decor"/>
           <p:cNvSpPr/>
           <p:nvPr/>
         </p:nvSpPr>
@@ -5148,7 +5002,7 @@
                 <a:ea typeface="Pretendard"/>
                 <a:cs typeface="Pretendard"/>
               </a:rPr>
-              <a:t>pi.py 예제 제출 — Pi is roughly 3.14</a:t>
+              <a:t>pi.py 예제 제출 — Pi is roughly 3.14…</a:t>
             </a:r>
           </a:p>
         </p:txBody>
@@ -5633,7 +5487,7 @@
       <p:grpSpPr/>
       <p:sp>
         <p:nvSpPr>
-          <p:cNvPr id="2" name="Oval 1"/>
+          <p:cNvPr id="2" name="deckgen:decor"/>
           <p:cNvSpPr/>
           <p:nvPr/>
         </p:nvSpPr>
@@ -5663,7 +5517,7 @@
       </p:sp>
       <p:sp>
         <p:nvSpPr>
-          <p:cNvPr id="3" name="Oval 2"/>
+          <p:cNvPr id="3" name="deckgen:decor"/>
           <p:cNvSpPr/>
           <p:nvPr/>
         </p:nvSpPr>
@@ -5693,7 +5547,7 @@
       </p:sp>
       <p:sp>
         <p:nvSpPr>
-          <p:cNvPr id="4" name="Oval 3"/>
+          <p:cNvPr id="4" name="deckgen:decor"/>
           <p:cNvSpPr/>
           <p:nvPr/>
         </p:nvSpPr>
@@ -5974,7 +5828,7 @@
                 <a:ea typeface="Pretendard"/>
                 <a:cs typeface="Pretendard"/>
               </a:rPr>
-              <a:t>8080 포트를 비우고 compose 파일을 직접 쓴다</a:t>
+              <a:t>히어독으로 compose 파일을 쓰고 마스터 1 + 워커 2 를 띄운다</a:t>
             </a:r>
           </a:p>
         </p:txBody>
@@ -6120,7 +5974,7 @@
                 <a:ea typeface="Pretendard"/>
                 <a:cs typeface="Pretendard"/>
               </a:rPr>
-              <a:t>docker compose up -d 로 마스터 1 + 워커 2 를 띄운다</a:t>
+              <a:t>로그와 마스터 UI 에서 워커 등록(ALIVE)을 확인한다</a:t>
             </a:r>
           </a:p>
         </p:txBody>
@@ -6266,7 +6120,7 @@
                 <a:ea typeface="Pretendard"/>
                 <a:cs typeface="Pretendard"/>
               </a:rPr>
-              <a:t>로그와 마스터 UI 에서 워커 등록(ALIVE)을 확인한다</a:t>
+              <a:t>--scale 로 워커를 늘렸다 줄이고 hostname 을 비교한다</a:t>
             </a:r>
           </a:p>
         </p:txBody>
@@ -6412,7 +6266,7 @@
                 <a:ea typeface="Pretendard"/>
                 <a:cs typeface="Pretendard"/>
               </a:rPr>
-              <a:t>--scale 로 워커를 늘렸다 줄이며 UI 가 따라 바뀌는 것을 본다</a:t>
+              <a:t>마스터를 일부러 끄고, 워커가 스스로 돌아오는 것을 본다</a:t>
             </a:r>
           </a:p>
         </p:txBody>
@@ -6624,7 +6478,7 @@
       <p:grpSpPr/>
       <p:sp>
         <p:nvSpPr>
-          <p:cNvPr id="2" name="Oval 1"/>
+          <p:cNvPr id="2" name="deckgen:decor"/>
           <p:cNvSpPr/>
           <p:nvPr/>
         </p:nvSpPr>
@@ -6654,7 +6508,7 @@
       </p:sp>
       <p:sp>
         <p:nvSpPr>
-          <p:cNvPr id="3" name="Oval 2"/>
+          <p:cNvPr id="3" name="deckgen:decor"/>
           <p:cNvSpPr/>
           <p:nvPr/>
         </p:nvSpPr>
@@ -6684,7 +6538,7 @@
       </p:sp>
       <p:sp>
         <p:nvSpPr>
-          <p:cNvPr id="4" name="Oval 3"/>
+          <p:cNvPr id="4" name="deckgen:decor"/>
           <p:cNvSpPr/>
           <p:nvPr/>
         </p:nvSpPr>
@@ -6789,7 +6643,7 @@
                 <a:ea typeface="Pretendard"/>
                 <a:cs typeface="Pretendard"/>
               </a:rPr>
-              <a:t>일곱 단계 — compose 파일 하나로 클러스터를</a:t>
+              <a:t>여덟 단계 — ~/data-eng/week5 한 폴더에서</a:t>
             </a:r>
           </a:p>
         </p:txBody>
@@ -6860,7 +6714,7 @@
                 <a:ea typeface="Pretendard"/>
                 <a:cs typeface="Pretendard"/>
               </a:rPr>
-              <a:t>~/data-eng/week5 폴더에서 시작합니다 — 4주차 컨테이너가 8080 을 쓰고 있으면 먼저 내려 둡니다</a:t>
+              <a:t>4주차 컨테이너가 8080 을 쓰고 있으면 먼저 내려 둡니다 — 볼륨은 남습니다</a:t>
             </a:r>
           </a:p>
         </p:txBody>
@@ -6965,7 +6819,7 @@
                 <a:ea typeface="Pretendard"/>
                 <a:cs typeface="Pretendard"/>
               </a:rPr>
-              <a:t>1. 포트 비우기</a:t>
+              <a:t>1·2. 준비</a:t>
             </a:r>
           </a:p>
         </p:txBody>
@@ -7006,7 +6860,7 @@
                 <a:ea typeface="Pretendard"/>
                 <a:cs typeface="Pretendard"/>
               </a:rPr>
-              <a:t>docker ps</a:t>
+              <a:t>포트 비우기</a:t>
             </a:r>
           </a:p>
           <a:p>
@@ -7024,7 +6878,7 @@
                 <a:ea typeface="Pretendard"/>
                 <a:cs typeface="Pretendard"/>
               </a:rPr>
-              <a:t>8080 확인</a:t>
+              <a:t>compose 히어독</a:t>
             </a:r>
           </a:p>
         </p:txBody>
@@ -7129,7 +6983,7 @@
                 <a:ea typeface="Pretendard"/>
                 <a:cs typeface="Pretendard"/>
               </a:rPr>
-              <a:t>2. compose 작성</a:t>
+              <a:t>3. 기동</a:t>
             </a:r>
           </a:p>
         </p:txBody>
@@ -7170,7 +7024,7 @@
                 <a:ea typeface="Pretendard"/>
                 <a:cs typeface="Pretendard"/>
               </a:rPr>
-              <a:t>master + worker</a:t>
+              <a:t>config → up -d</a:t>
             </a:r>
           </a:p>
           <a:p>
@@ -7188,7 +7042,7 @@
                 <a:ea typeface="Pretendard"/>
                 <a:cs typeface="Pretendard"/>
               </a:rPr>
-              <a:t>replicas: 2</a:t>
+              <a:t>→ ps</a:t>
             </a:r>
           </a:p>
         </p:txBody>
@@ -7293,7 +7147,7 @@
                 <a:ea typeface="Pretendard"/>
                 <a:cs typeface="Pretendard"/>
               </a:rPr>
-              <a:t>3. 기동</a:t>
+              <a:t>4·5. 로그·UI</a:t>
             </a:r>
           </a:p>
         </p:txBody>
@@ -7334,7 +7188,7 @@
                 <a:ea typeface="Pretendard"/>
                 <a:cs typeface="Pretendard"/>
               </a:rPr>
-              <a:t>config → up -d</a:t>
+              <a:t>등록 기록</a:t>
             </a:r>
           </a:p>
           <a:p>
@@ -7352,7 +7206,7 @@
                 <a:ea typeface="Pretendard"/>
                 <a:cs typeface="Pretendard"/>
               </a:rPr>
-              <a:t>→ ps</a:t>
+              <a:t>localhost:8080</a:t>
             </a:r>
           </a:p>
         </p:txBody>
@@ -7457,7 +7311,7 @@
                 <a:ea typeface="Pretendard"/>
                 <a:cs typeface="Pretendard"/>
               </a:rPr>
-              <a:t>4·5. 로그·UI</a:t>
+              <a:t>6·7. 스케일</a:t>
             </a:r>
           </a:p>
         </p:txBody>
@@ -7498,7 +7352,7 @@
                 <a:ea typeface="Pretendard"/>
                 <a:cs typeface="Pretendard"/>
               </a:rPr>
-              <a:t>등록 기록</a:t>
+              <a:t>--scale 3 → 2</a:t>
             </a:r>
           </a:p>
           <a:p>
@@ -7516,7 +7370,7 @@
                 <a:ea typeface="Pretendard"/>
                 <a:cs typeface="Pretendard"/>
               </a:rPr>
-              <a:t>localhost:8080</a:t>
+              <a:t>hostname 비교</a:t>
             </a:r>
           </a:p>
         </p:txBody>
@@ -7621,7 +7475,7 @@
                 <a:ea typeface="Pretendard"/>
                 <a:cs typeface="Pretendard"/>
               </a:rPr>
-              <a:t>6·7. 스케일</a:t>
+              <a:t>8. 실패·복구</a:t>
             </a:r>
           </a:p>
         </p:txBody>
@@ -7662,7 +7516,7 @@
                 <a:ea typeface="Pretendard"/>
                 <a:cs typeface="Pretendard"/>
               </a:rPr>
-              <a:t>--scale 3 → 2</a:t>
+              <a:t>마스터 stop</a:t>
             </a:r>
           </a:p>
           <a:p>
@@ -7680,7 +7534,7 @@
                 <a:ea typeface="Pretendard"/>
                 <a:cs typeface="Pretendard"/>
               </a:rPr>
-              <a:t>hostname 비교</a:t>
+              <a:t>→ start</a:t>
             </a:r>
           </a:p>
         </p:txBody>
@@ -7817,7 +7671,7 @@
       <p:grpSpPr/>
       <p:sp>
         <p:nvSpPr>
-          <p:cNvPr id="2" name="Oval 1"/>
+          <p:cNvPr id="2" name="deckgen:decor"/>
           <p:cNvSpPr/>
           <p:nvPr/>
         </p:nvSpPr>
@@ -7847,7 +7701,7 @@
       </p:sp>
       <p:sp>
         <p:nvSpPr>
-          <p:cNvPr id="3" name="Oval 2"/>
+          <p:cNvPr id="3" name="deckgen:decor"/>
           <p:cNvSpPr/>
           <p:nvPr/>
         </p:nvSpPr>
@@ -7877,7 +7731,7 @@
       </p:sp>
       <p:sp>
         <p:nvSpPr>
-          <p:cNvPr id="4" name="Oval 3"/>
+          <p:cNvPr id="4" name="deckgen:decor"/>
           <p:cNvSpPr/>
           <p:nvPr/>
         </p:nvSpPr>
@@ -8529,7 +8383,7 @@
                 <a:ea typeface="Pretendard"/>
                 <a:cs typeface="Pretendard"/>
               </a:rPr>
-              <a:t>8080:8080 · 7077:7077</a:t>
+              <a:t>--host spark-master</a:t>
             </a:r>
           </a:p>
         </p:txBody>
@@ -8604,7 +8458,7 @@
                 <a:ea typeface="Pretendard"/>
                 <a:cs typeface="Pretendard"/>
               </a:rPr>
-              <a:t>마스터 웹 UI · 접수 포트</a:t>
+              <a:t>주소를 IP 대신 이름으로 알림</a:t>
             </a:r>
           </a:p>
         </p:txBody>
@@ -8679,7 +8533,7 @@
                 <a:ea typeface="Pretendard"/>
                 <a:cs typeface="Pretendard"/>
               </a:rPr>
-              <a:t>…deploy.worker.Worker</a:t>
+              <a:t>8080:8080 · 7077:7077</a:t>
             </a:r>
           </a:p>
         </p:txBody>
@@ -8754,7 +8608,7 @@
                 <a:ea typeface="Pretendard"/>
                 <a:cs typeface="Pretendard"/>
               </a:rPr>
-              <a:t>워커 — 첫 인자로 마스터 주소</a:t>
+              <a:t>마스터 웹 UI · 접수 포트</a:t>
             </a:r>
           </a:p>
         </p:txBody>
@@ -8829,7 +8683,7 @@
                 <a:ea typeface="Pretendard"/>
                 <a:cs typeface="Pretendard"/>
               </a:rPr>
-              <a:t>spark://spark-master:7077</a:t>
+              <a:t>…deploy.worker.Worker</a:t>
             </a:r>
           </a:p>
         </p:txBody>
@@ -8904,7 +8758,7 @@
                 <a:ea typeface="Pretendard"/>
                 <a:cs typeface="Pretendard"/>
               </a:rPr>
-              <a:t>마스터 주소 = 서비스 이름</a:t>
+              <a:t>워커 — 첫 인자로 마스터 주소</a:t>
             </a:r>
           </a:p>
         </p:txBody>
@@ -8979,7 +8833,7 @@
                 <a:ea typeface="Pretendard"/>
                 <a:cs typeface="Pretendard"/>
               </a:rPr>
-              <a:t>--cores 2 --memory 2g</a:t>
+              <a:t>spark://spark-master:7077</a:t>
             </a:r>
           </a:p>
         </p:txBody>
@@ -9054,7 +8908,7 @@
                 <a:ea typeface="Pretendard"/>
                 <a:cs typeface="Pretendard"/>
               </a:rPr>
-              <a:t>이 워커가 클러스터에 내놓을 자원</a:t>
+              <a:t>마스터 주소 = 서비스 이름</a:t>
             </a:r>
           </a:p>
         </p:txBody>
@@ -9129,7 +8983,7 @@
                 <a:ea typeface="Pretendard"/>
                 <a:cs typeface="Pretendard"/>
               </a:rPr>
-              <a:t>depends_on: spark-master</a:t>
+              <a:t>--cores 2 --memory 2g</a:t>
             </a:r>
           </a:p>
         </p:txBody>
@@ -9204,7 +9058,7 @@
                 <a:ea typeface="Pretendard"/>
                 <a:cs typeface="Pretendard"/>
               </a:rPr>
-              <a:t>마스터를 먼저 띄운다</a:t>
+              <a:t>이 워커가 내놓을 자원</a:t>
             </a:r>
           </a:p>
         </p:txBody>
@@ -9395,7 +9249,7 @@
                 <a:ea typeface="Pretendard"/>
                 <a:cs typeface="Pretendard"/>
               </a:rPr>
-              <a:t>RAM 16GB 면 replicas: 1 또는 deploy 블록 삭제 — 워커 2 × 2G 에 마스터·드라이버·OS 까지 더하면 빠듯하다</a:t>
+              <a:t>--host 를 빼도 돌지만 UI URL·워커 로그가 spark://172.x.x.x:7077 로 나온다(실측)</a:t>
             </a:r>
           </a:p>
         </p:txBody>
@@ -9532,7 +9386,7 @@
       <p:grpSpPr/>
       <p:sp>
         <p:nvSpPr>
-          <p:cNvPr id="2" name="Oval 1"/>
+          <p:cNvPr id="2" name="deckgen:decor"/>
           <p:cNvSpPr/>
           <p:nvPr/>
         </p:nvSpPr>
@@ -9562,7 +9416,7 @@
       </p:sp>
       <p:sp>
         <p:nvSpPr>
-          <p:cNvPr id="3" name="Oval 2"/>
+          <p:cNvPr id="3" name="deckgen:decor"/>
           <p:cNvSpPr/>
           <p:nvPr/>
         </p:nvSpPr>
@@ -9592,7 +9446,7 @@
       </p:sp>
       <p:sp>
         <p:nvSpPr>
-          <p:cNvPr id="4" name="Oval 3"/>
+          <p:cNvPr id="4" name="deckgen:decor"/>
           <p:cNvSpPr/>
           <p:nvPr/>
         </p:nvSpPr>
@@ -9656,7 +9510,7 @@
                 <a:ea typeface="Pretendard"/>
                 <a:cs typeface="Pretendard"/>
               </a:rPr>
-              <a:t>1·3·4단계</a:t>
+              <a:t>1·2·3·4단계</a:t>
             </a:r>
           </a:p>
         </p:txBody>
@@ -9697,7 +9551,7 @@
                 <a:ea typeface="Pretendard"/>
                 <a:cs typeface="Pretendard"/>
               </a:rPr>
-              <a:t>핵심 명령 — 비우고 · 확인하고 · 띄우고 · 로그</a:t>
+              <a:t>핵심 명령 — 비우고 · 쓰고 · 띄우고 · 로그</a:t>
             </a:r>
           </a:p>
         </p:txBody>
@@ -9942,7 +9796,7 @@
                 <a:ea typeface="Pretendard"/>
                 <a:cs typeface="Pretendard"/>
               </a:rPr>
-              <a:t>문법 확인</a:t>
+              <a:t>파일 만들기</a:t>
             </a:r>
           </a:p>
         </p:txBody>
@@ -10015,7 +9869,7 @@
                 <a:ea typeface="Pretendard"/>
                 <a:cs typeface="Pretendard"/>
               </a:rPr>
-              <a:t>docker compose config</a:t>
+              <a:t>cat &gt; docker-compose.yml &lt;&lt; 'EOF'</a:t>
             </a:r>
           </a:p>
         </p:txBody>
@@ -10086,7 +9940,7 @@
                 <a:ea typeface="Pretendard"/>
                 <a:cs typeface="Pretendard"/>
               </a:rPr>
-              <a:t>기동</a:t>
+              <a:t>문법 확인</a:t>
             </a:r>
           </a:p>
         </p:txBody>
@@ -10159,7 +10013,7 @@
                 <a:ea typeface="Pretendard"/>
                 <a:cs typeface="Pretendard"/>
               </a:rPr>
-              <a:t>docker compose up -d</a:t>
+              <a:t>docker compose config</a:t>
             </a:r>
           </a:p>
         </p:txBody>
@@ -10230,7 +10084,7 @@
                 <a:ea typeface="Pretendard"/>
                 <a:cs typeface="Pretendard"/>
               </a:rPr>
-              <a:t>상태</a:t>
+              <a:t>기동 · 상태</a:t>
             </a:r>
           </a:p>
         </p:txBody>
@@ -10303,7 +10157,7 @@
                 <a:ea typeface="Pretendard"/>
                 <a:cs typeface="Pretendard"/>
               </a:rPr>
-              <a:t>docker compose ps</a:t>
+              <a:t>docker compose up -d · docker compose ps</a:t>
             </a:r>
           </a:p>
         </p:txBody>
@@ -10769,7 +10623,7 @@
       <p:grpSpPr/>
       <p:sp>
         <p:nvSpPr>
-          <p:cNvPr id="2" name="Oval 1"/>
+          <p:cNvPr id="2" name="deckgen:decor"/>
           <p:cNvSpPr/>
           <p:nvPr/>
         </p:nvSpPr>
@@ -10799,7 +10653,7 @@
       </p:sp>
       <p:sp>
         <p:nvSpPr>
-          <p:cNvPr id="3" name="Oval 2"/>
+          <p:cNvPr id="3" name="deckgen:decor"/>
           <p:cNvSpPr/>
           <p:nvPr/>
         </p:nvSpPr>
@@ -10829,7 +10683,7 @@
       </p:sp>
       <p:sp>
         <p:nvSpPr>
-          <p:cNvPr id="4" name="Oval 3"/>
+          <p:cNvPr id="4" name="deckgen:decor"/>
           <p:cNvSpPr/>
           <p:nvPr/>
         </p:nvSpPr>
@@ -10893,7 +10747,7 @@
                 <a:ea typeface="Pretendard"/>
                 <a:cs typeface="Pretendard"/>
               </a:rPr>
-              <a:t>3·4·5단계</a:t>
+              <a:t>3·4단계</a:t>
             </a:r>
           </a:p>
         </p:txBody>
@@ -10934,7 +10788,7 @@
                 <a:ea typeface="Pretendard"/>
                 <a:cs typeface="Pretendard"/>
               </a:rPr>
-              <a:t>기동 뒤 확인 — ps · 로그 · 마스터 UI</a:t>
+              <a:t>기동 뒤 확인 — ps 와 등록 로그</a:t>
             </a:r>
           </a:p>
         </p:txBody>
@@ -11110,7 +10964,7 @@
                 <a:ea typeface="Pretendard"/>
                 <a:cs typeface="Pretendard"/>
               </a:rPr>
-              <a:t>docker compose ps — 모두 Up</a:t>
+              <a:t>up -d — 세 컨테이너 Started</a:t>
             </a:r>
           </a:p>
         </p:txBody>
@@ -11151,7 +11005,7 @@
                 <a:ea typeface="Pretendard"/>
                 <a:cs typeface="Pretendard"/>
               </a:rPr>
-              <a:t>spark-master 1개와 spark-worker 컨테이너가 전부 Up 상태</a:t>
+              <a:t>spark-master · week5-spark-worker-1 · 2 — ps 에 셋 다 Up</a:t>
             </a:r>
           </a:p>
         </p:txBody>
@@ -11297,7 +11151,7 @@
                 <a:ea typeface="Pretendard"/>
                 <a:cs typeface="Pretendard"/>
               </a:rPr>
-              <a:t>로그 — 등록 기록 두 줄</a:t>
+              <a:t>마스터 로그 — 등록 두 줄</a:t>
             </a:r>
           </a:p>
         </p:txBody>
@@ -11338,7 +11192,7 @@
                 <a:ea typeface="Pretendard"/>
                 <a:cs typeface="Pretendard"/>
               </a:rPr>
-              <a:t>마스터 「Registering worker …」 · 워커 「Successfully registered with master」</a:t>
+              <a:t>Registering worker 172.x:포트 with 2 cores, 2.0 GiB RAM</a:t>
             </a:r>
           </a:p>
         </p:txBody>
@@ -11484,7 +11338,7 @@
                 <a:ea typeface="Pretendard"/>
                 <a:cs typeface="Pretendard"/>
               </a:rPr>
-              <a:t>localhost:8080 — Workers 표</a:t>
+              <a:t>워커 로그 — 워커마다</a:t>
             </a:r>
           </a:p>
         </p:txBody>
@@ -11525,7 +11379,7 @@
                 <a:ea typeface="Pretendard"/>
                 <a:cs typeface="Pretendard"/>
               </a:rPr>
-              <a:t>워커들이 ALIVE — 이론의 흐름 ②~④ 가 로그와 화면으로 남은 것</a:t>
+              <a:t>Connecting to master spark-master:7077... → Successfully registered</a:t>
             </a:r>
           </a:p>
         </p:txBody>
@@ -11600,7 +11454,7 @@
                 <a:ea typeface="Pretendard"/>
                 <a:cs typeface="Pretendard"/>
               </a:rPr>
-              <a:t>워커 2개일 때 UI 수치</a:t>
+              <a:t>up 직후 몇 초는</a:t>
             </a:r>
           </a:p>
         </p:txBody>
@@ -11641,7 +11495,7 @@
                 <a:ea typeface="Pretendard"/>
                 <a:cs typeface="Pretendard"/>
               </a:rPr>
-              <a:t>Cores 4</a:t>
+              <a:t>로그가 아직</a:t>
             </a:r>
           </a:p>
           <a:p>
@@ -11659,7 +11513,7 @@
                 <a:ea typeface="Pretendard"/>
                 <a:cs typeface="Pretendard"/>
               </a:rPr>
-              <a:t>Memory 4G</a:t>
+              <a:t>없을 수 있음</a:t>
             </a:r>
           </a:p>
         </p:txBody>
@@ -11796,7 +11650,7 @@
       <p:grpSpPr/>
       <p:sp>
         <p:nvSpPr>
-          <p:cNvPr id="2" name="Oval 1"/>
+          <p:cNvPr id="2" name="deckgen:decor"/>
           <p:cNvSpPr/>
           <p:nvPr/>
         </p:nvSpPr>
@@ -11826,7 +11680,7 @@
       </p:sp>
       <p:sp>
         <p:nvSpPr>
-          <p:cNvPr id="3" name="Oval 2"/>
+          <p:cNvPr id="3" name="deckgen:decor"/>
           <p:cNvSpPr/>
           <p:nvPr/>
         </p:nvSpPr>
@@ -11856,7 +11710,7 @@
       </p:sp>
       <p:sp>
         <p:nvSpPr>
-          <p:cNvPr id="4" name="Oval 3"/>
+          <p:cNvPr id="4" name="deckgen:decor"/>
           <p:cNvSpPr/>
           <p:nvPr/>
         </p:nvSpPr>
@@ -11961,7 +11815,7 @@
                 <a:ea typeface="Pretendard"/>
                 <a:cs typeface="Pretendard"/>
               </a:rPr>
-              <a:t>마스터 UI 화면 — 네 곳을 읽는다</a:t>
+              <a:t>마스터 UI(localhost:8080) — 네 곳을 읽는다</a:t>
             </a:r>
           </a:p>
         </p:txBody>
@@ -12188,7 +12042,7 @@
                 <a:ea typeface="Pretendard"/>
                 <a:cs typeface="Pretendard"/>
               </a:rPr>
-              <a:t>다음 1H 에 잡을 제출할 때 쓸 주소</a:t>
+              <a:t>다음 1H 에 잡을 제출할 주소 — --host 덕분에 이름으로</a:t>
             </a:r>
           </a:p>
         </p:txBody>
@@ -12364,7 +12218,7 @@
                 <a:ea typeface="Pretendard"/>
                 <a:cs typeface="Pretendard"/>
               </a:rPr>
-              <a:t>Alive Workers · Cores in use · Memory in use</a:t>
+              <a:t>Alive Workers: 2</a:t>
             </a:r>
           </a:p>
           <a:p>
@@ -12385,7 +12239,7 @@
                 <a:ea typeface="Pretendard"/>
                 <a:cs typeface="Pretendard"/>
               </a:rPr>
-              <a:t>지금 클러스터가 가진 자원 — 오늘 제출할 잡이 쓸 수 있는 상한</a:t>
+              <a:t>Workers 표에 워커 두 줄이 ALIVE</a:t>
             </a:r>
           </a:p>
         </p:txBody>
@@ -12561,7 +12415,7 @@
                 <a:ea typeface="Pretendard"/>
                 <a:cs typeface="Pretendard"/>
               </a:rPr>
-              <a:t>Workers 표</a:t>
+              <a:t>Cores in use: 4 Total, 0 Used</a:t>
             </a:r>
           </a:p>
           <a:p>
@@ -12582,7 +12436,7 @@
                 <a:ea typeface="Pretendard"/>
                 <a:cs typeface="Pretendard"/>
               </a:rPr>
-              <a:t>워커마다 주소·상태·코어·메모리</a:t>
+              <a:t>잡이 없어 Used 는 0 — Total 이 오늘 잡이 쓸 상한</a:t>
             </a:r>
           </a:p>
         </p:txBody>
@@ -12758,7 +12612,7 @@
                 <a:ea typeface="Pretendard"/>
                 <a:cs typeface="Pretendard"/>
               </a:rPr>
-              <a:t>Running / Completed Applications</a:t>
+              <a:t>Memory in use: 4.0 GiB Total</a:t>
             </a:r>
           </a:p>
           <a:p>
@@ -12779,7 +12633,7 @@
                 <a:ea typeface="Pretendard"/>
                 <a:cs typeface="Pretendard"/>
               </a:rPr>
-              <a:t>잡 이력 — 지금은 비어 있고, 다음 1H 에 채워진다</a:t>
+              <a:t>Running / Completed Applications 는 아직 비어 있음</a:t>
             </a:r>
           </a:p>
         </p:txBody>
@@ -12850,7 +12704,7 @@
                 <a:ea typeface="Pretendard"/>
                 <a:cs typeface="Pretendard"/>
               </a:rPr>
-              <a:t>워커 2개 구성이면 Cores in use 4 · Memory 4.0 GiB 안팎 — 이 숫자가 오늘 제출할 잡이 쓸 수 있는 상한</a:t>
+              <a:t>Total 은 워커가 내놓은 자원의 합 — --cores 2 --memory 2g × 워커 2</a:t>
             </a:r>
           </a:p>
         </p:txBody>
@@ -12987,7 +12841,7 @@
       <p:grpSpPr/>
       <p:sp>
         <p:nvSpPr>
-          <p:cNvPr id="2" name="Oval 1"/>
+          <p:cNvPr id="2" name="deckgen:decor"/>
           <p:cNvSpPr/>
           <p:nvPr/>
         </p:nvSpPr>
@@ -13017,7 +12871,7 @@
       </p:sp>
       <p:sp>
         <p:nvSpPr>
-          <p:cNvPr id="3" name="Oval 2"/>
+          <p:cNvPr id="3" name="deckgen:decor"/>
           <p:cNvSpPr/>
           <p:nvPr/>
         </p:nvSpPr>
@@ -13047,7 +12901,7 @@
       </p:sp>
       <p:sp>
         <p:nvSpPr>
-          <p:cNvPr id="4" name="Oval 3"/>
+          <p:cNvPr id="4" name="deckgen:decor"/>
           <p:cNvSpPr/>
           <p:nvPr/>
         </p:nvSpPr>
@@ -13111,7 +12965,7 @@
                 <a:ea typeface="Pretendard"/>
                 <a:cs typeface="Pretendard"/>
               </a:rPr>
-              <a:t>6·7단계 — 일부러 실패시키기</a:t>
+              <a:t>6·7단계</a:t>
             </a:r>
           </a:p>
         </p:txBody>
@@ -13152,7 +13006,7 @@
                 <a:ea typeface="Pretendard"/>
                 <a:cs typeface="Pretendard"/>
               </a:rPr>
-              <a:t>워커를 늘렸다 줄이기 — 죽는 것도 본다</a:t>
+              <a:t>늘렸다 줄이고 — 정말 여러 대인지 본다</a:t>
             </a:r>
           </a:p>
         </p:txBody>
@@ -13189,59 +13043,18 @@
       </p:sp>
       <p:sp>
         <p:nvSpPr>
-          <p:cNvPr id="8" name="TextBox 7"/>
-          <p:cNvSpPr txBox="1"/>
-          <p:nvPr/>
-        </p:nvSpPr>
-        <p:spPr>
-          <a:xfrm>
-            <a:off x="1143000" y="3067050"/>
-            <a:ext cx="16002000" cy="438150"/>
-          </a:xfrm>
-          <a:prstGeom prst="rect">
-            <a:avLst/>
-          </a:prstGeom>
-          <a:noFill/>
-        </p:spPr>
-        <p:txBody>
-          <a:bodyPr wrap="square" lIns="0" rIns="0" tIns="0" bIns="0" anchor="t">
-            <a:spAutoFit/>
-          </a:bodyPr>
-          <a:lstStyle/>
-          <a:p>
-            <a:pPr algn="l">
-              <a:lnSpc>
-                <a:spcPct val="130000"/>
-              </a:lnSpc>
-            </a:pPr>
-            <a:r>
-              <a:rPr sz="2550" b="1">
-                <a:solidFill>
-                  <a:srgbClr val="3D3D3D"/>
-                </a:solidFill>
-                <a:latin typeface="Pretendard"/>
-                <a:ea typeface="Pretendard"/>
-                <a:cs typeface="Pretendard"/>
-              </a:rPr>
-              <a:t>--scale 로 워커 수를 바꾸며 UI 가 따라오는 것을, 메모리를 넘기면 뜨자마자 죽는 것을 봅니다</a:t>
-            </a:r>
-          </a:p>
-        </p:txBody>
-      </p:sp>
-      <p:sp>
-        <p:nvSpPr>
-          <p:cNvPr id="9" name="Rounded Rectangle 8"/>
-          <p:cNvSpPr/>
-          <p:nvPr/>
-        </p:nvSpPr>
-        <p:spPr>
-          <a:xfrm>
-            <a:off x="1143000" y="3924300"/>
-            <a:ext cx="2895600" cy="3143250"/>
+          <p:cNvPr id="8" name="Rounded Rectangle 7"/>
+          <p:cNvSpPr/>
+          <p:nvPr/>
+        </p:nvSpPr>
+        <p:spPr>
+          <a:xfrm>
+            <a:off x="1143000" y="2933700"/>
+            <a:ext cx="11430000" cy="1095375"/>
           </a:xfrm>
           <a:prstGeom prst="roundRect">
             <a:avLst>
-              <a:gd name="adj" fmla="val 1644"/>
+              <a:gd name="adj" fmla="val 4347"/>
             </a:avLst>
           </a:prstGeom>
           <a:solidFill>
@@ -13264,16 +13077,16 @@
       </p:sp>
       <p:sp>
         <p:nvSpPr>
-          <p:cNvPr id="10" name="Rectangle 9"/>
-          <p:cNvSpPr/>
-          <p:nvPr/>
-        </p:nvSpPr>
-        <p:spPr>
-          <a:xfrm>
-            <a:off x="1143000" y="3924300"/>
-            <a:ext cx="2895600" cy="914400"/>
-          </a:xfrm>
-          <a:prstGeom prst="rect">
+          <p:cNvPr id="9" name="Oval 8"/>
+          <p:cNvSpPr/>
+          <p:nvPr/>
+        </p:nvSpPr>
+        <p:spPr>
+          <a:xfrm>
+            <a:off x="1447800" y="3181350"/>
+            <a:ext cx="590550" cy="590550"/>
+          </a:xfrm>
+          <a:prstGeom prst="ellipse">
             <a:avLst/>
           </a:prstGeom>
           <a:solidFill>
@@ -13294,14 +13107,55 @@
       </p:sp>
       <p:sp>
         <p:nvSpPr>
+          <p:cNvPr id="10" name="TextBox 9"/>
+          <p:cNvSpPr txBox="1"/>
+          <p:nvPr/>
+        </p:nvSpPr>
+        <p:spPr>
+          <a:xfrm>
+            <a:off x="1447800" y="3333750"/>
+            <a:ext cx="590550" cy="323850"/>
+          </a:xfrm>
+          <a:prstGeom prst="rect">
+            <a:avLst/>
+          </a:prstGeom>
+          <a:noFill/>
+        </p:spPr>
+        <p:txBody>
+          <a:bodyPr wrap="square" lIns="0" rIns="0" tIns="0" bIns="0" anchor="t">
+            <a:spAutoFit/>
+          </a:bodyPr>
+          <a:lstStyle/>
+          <a:p>
+            <a:pPr algn="ctr">
+              <a:lnSpc>
+                <a:spcPct val="100000"/>
+              </a:lnSpc>
+            </a:pPr>
+            <a:r>
+              <a:rPr sz="2250" b="1">
+                <a:solidFill>
+                  <a:srgbClr val="FFFFFF"/>
+                </a:solidFill>
+                <a:latin typeface="Pretendard"/>
+                <a:ea typeface="Pretendard"/>
+                <a:cs typeface="Pretendard"/>
+              </a:rPr>
+              <a:t>1</a:t>
+            </a:r>
+          </a:p>
+        </p:txBody>
+      </p:sp>
+      <p:sp>
+        <p:nvSpPr>
           <p:cNvPr id="11" name="TextBox 10"/>
           <p:cNvSpPr txBox="1"/>
           <p:nvPr/>
         </p:nvSpPr>
         <p:spPr>
           <a:xfrm>
-            <a:off x="1143000" y="4171950"/>
-            <a:ext cx="2895600" cy="419100"/>
+            <a:off x="2324100" y="3143250"/>
+            <a:ext cx="9906000" cy="400050"/>
           </a:xfrm>
           <a:prstGeom prst="rect">
             <a:avLst/>
@@ -13314,21 +13168,21 @@
           </a:bodyPr>
           <a:lstStyle/>
           <a:p>
-            <a:pPr algn="ctr">
-              <a:lnSpc>
-                <a:spcPct val="100000"/>
+            <a:pPr algn="l">
+              <a:lnSpc>
+                <a:spcPct val="110000"/>
               </a:lnSpc>
             </a:pPr>
             <a:r>
               <a:rPr sz="2475" b="1">
                 <a:solidFill>
-                  <a:srgbClr val="FFFFFF"/>
-                </a:solidFill>
-                <a:latin typeface="Pretendard"/>
-                <a:ea typeface="Pretendard"/>
-                <a:cs typeface="Pretendard"/>
-              </a:rPr>
-              <a:t>3개로</a:t>
+                  <a:srgbClr val="0D2B5E"/>
+                </a:solidFill>
+                <a:latin typeface="Pretendard"/>
+                <a:ea typeface="Pretendard"/>
+                <a:cs typeface="Pretendard"/>
+              </a:rPr>
+              <a:t>--scale spark-worker=3</a:t>
             </a:r>
           </a:p>
         </p:txBody>
@@ -13341,8 +13195,8 @@
         </p:nvSpPr>
         <p:spPr>
           <a:xfrm>
-            <a:off x="1352550" y="5143500"/>
-            <a:ext cx="2476500" cy="1524000"/>
+            <a:off x="2324100" y="3543300"/>
+            <a:ext cx="9906000" cy="361950"/>
           </a:xfrm>
           <a:prstGeom prst="rect">
             <a:avLst/>
@@ -13355,13 +13209,13 @@
           </a:bodyPr>
           <a:lstStyle/>
           <a:p>
-            <a:pPr algn="ctr">
-              <a:lnSpc>
-                <a:spcPct val="146000"/>
-              </a:lnSpc>
-            </a:pPr>
-            <a:r>
-              <a:rPr sz="2100" b="0">
+            <a:pPr algn="l">
+              <a:lnSpc>
+                <a:spcPct val="120000"/>
+              </a:lnSpc>
+            </a:pPr>
+            <a:r>
+              <a:rPr sz="2025" b="0">
                 <a:solidFill>
                   <a:srgbClr val="3D3D3D"/>
                 </a:solidFill>
@@ -13369,25 +13223,7 @@
                 <a:ea typeface="Pretendard"/>
                 <a:cs typeface="Pretendard"/>
               </a:rPr>
-              <a:t>--scale</a:t>
-            </a:r>
-          </a:p>
-          <a:p>
-            <a:pPr algn="ctr">
-              <a:lnSpc>
-                <a:spcPct val="146000"/>
-              </a:lnSpc>
-            </a:pPr>
-            <a:r>
-              <a:rPr sz="2100" b="0">
-                <a:solidFill>
-                  <a:srgbClr val="3D3D3D"/>
-                </a:solidFill>
-                <a:latin typeface="Pretendard"/>
-                <a:ea typeface="Pretendard"/>
-                <a:cs typeface="Pretendard"/>
-              </a:rPr>
-              <a:t>spark-worker=3</a:t>
+              <a:t>worker-3 Started — Alive Workers 3 · Cores 6 Total · 6.0 GiB</a:t>
             </a:r>
           </a:p>
         </p:txBody>
@@ -13400,12 +13236,12 @@
         </p:nvSpPr>
         <p:spPr>
           <a:xfrm>
-            <a:off x="4419600" y="3924300"/>
-            <a:ext cx="2895600" cy="3143250"/>
+            <a:off x="1143000" y="4200525"/>
+            <a:ext cx="11430000" cy="1095375"/>
           </a:xfrm>
           <a:prstGeom prst="roundRect">
             <a:avLst>
-              <a:gd name="adj" fmla="val 1644"/>
+              <a:gd name="adj" fmla="val 4347"/>
             </a:avLst>
           </a:prstGeom>
           <a:solidFill>
@@ -13428,20 +13264,20 @@
       </p:sp>
       <p:sp>
         <p:nvSpPr>
-          <p:cNvPr id="14" name="Rectangle 13"/>
-          <p:cNvSpPr/>
-          <p:nvPr/>
-        </p:nvSpPr>
-        <p:spPr>
-          <a:xfrm>
-            <a:off x="4419600" y="3924300"/>
-            <a:ext cx="2895600" cy="914400"/>
-          </a:xfrm>
-          <a:prstGeom prst="rect">
-            <a:avLst/>
-          </a:prstGeom>
-          <a:solidFill>
-            <a:srgbClr val="1E5BC6"/>
+          <p:cNvPr id="14" name="Oval 13"/>
+          <p:cNvSpPr/>
+          <p:nvPr/>
+        </p:nvSpPr>
+        <p:spPr>
+          <a:xfrm>
+            <a:off x="1447800" y="4448175"/>
+            <a:ext cx="590550" cy="590550"/>
+          </a:xfrm>
+          <a:prstGeom prst="ellipse">
+            <a:avLst/>
+          </a:prstGeom>
+          <a:solidFill>
+            <a:srgbClr val="0D2B5E"/>
           </a:solidFill>
           <a:ln>
             <a:noFill/>
@@ -13464,8 +13300,8 @@
         </p:nvSpPr>
         <p:spPr>
           <a:xfrm>
-            <a:off x="4419600" y="4171950"/>
-            <a:ext cx="2895600" cy="419100"/>
+            <a:off x="1447800" y="4600575"/>
+            <a:ext cx="590550" cy="323850"/>
           </a:xfrm>
           <a:prstGeom prst="rect">
             <a:avLst/>
@@ -13484,29 +13320,70 @@
               </a:lnSpc>
             </a:pPr>
             <a:r>
+              <a:rPr sz="2250" b="1">
+                <a:solidFill>
+                  <a:srgbClr val="FFFFFF"/>
+                </a:solidFill>
+                <a:latin typeface="Pretendard"/>
+                <a:ea typeface="Pretendard"/>
+                <a:cs typeface="Pretendard"/>
+              </a:rPr>
+              <a:t>2</a:t>
+            </a:r>
+          </a:p>
+        </p:txBody>
+      </p:sp>
+      <p:sp>
+        <p:nvSpPr>
+          <p:cNvPr id="16" name="TextBox 15"/>
+          <p:cNvSpPr txBox="1"/>
+          <p:nvPr/>
+        </p:nvSpPr>
+        <p:spPr>
+          <a:xfrm>
+            <a:off x="2324100" y="4410075"/>
+            <a:ext cx="9906000" cy="400050"/>
+          </a:xfrm>
+          <a:prstGeom prst="rect">
+            <a:avLst/>
+          </a:prstGeom>
+          <a:noFill/>
+        </p:spPr>
+        <p:txBody>
+          <a:bodyPr wrap="square" lIns="0" rIns="0" tIns="0" bIns="0" anchor="t">
+            <a:spAutoFit/>
+          </a:bodyPr>
+          <a:lstStyle/>
+          <a:p>
+            <a:pPr algn="l">
+              <a:lnSpc>
+                <a:spcPct val="110000"/>
+              </a:lnSpc>
+            </a:pPr>
+            <a:r>
               <a:rPr sz="2475" b="1">
                 <a:solidFill>
-                  <a:srgbClr val="FFFFFF"/>
-                </a:solidFill>
-                <a:latin typeface="Pretendard"/>
-                <a:ea typeface="Pretendard"/>
-                <a:cs typeface="Pretendard"/>
-              </a:rPr>
-              <a:t>UI 새로고침</a:t>
-            </a:r>
-          </a:p>
-        </p:txBody>
-      </p:sp>
-      <p:sp>
-        <p:nvSpPr>
-          <p:cNvPr id="16" name="TextBox 15"/>
-          <p:cNvSpPr txBox="1"/>
-          <p:nvPr/>
-        </p:nvSpPr>
-        <p:spPr>
-          <a:xfrm>
-            <a:off x="4629150" y="5143500"/>
-            <a:ext cx="2476500" cy="1524000"/>
+                  <a:srgbClr val="0D2B5E"/>
+                </a:solidFill>
+                <a:latin typeface="Pretendard"/>
+                <a:ea typeface="Pretendard"/>
+                <a:cs typeface="Pretendard"/>
+              </a:rPr>
+              <a:t>--scale spark-worker=2</a:t>
+            </a:r>
+          </a:p>
+        </p:txBody>
+      </p:sp>
+      <p:sp>
+        <p:nvSpPr>
+          <p:cNvPr id="17" name="TextBox 16"/>
+          <p:cNvSpPr txBox="1"/>
+          <p:nvPr/>
+        </p:nvSpPr>
+        <p:spPr>
+          <a:xfrm>
+            <a:off x="2324100" y="4810125"/>
+            <a:ext cx="9906000" cy="361950"/>
           </a:xfrm>
           <a:prstGeom prst="rect">
             <a:avLst/>
@@ -13519,13 +13396,13 @@
           </a:bodyPr>
           <a:lstStyle/>
           <a:p>
-            <a:pPr algn="ctr">
-              <a:lnSpc>
-                <a:spcPct val="146000"/>
-              </a:lnSpc>
-            </a:pPr>
-            <a:r>
-              <a:rPr sz="2100" b="0">
+            <a:pPr algn="l">
+              <a:lnSpc>
+                <a:spcPct val="120000"/>
+              </a:lnSpc>
+            </a:pPr>
+            <a:r>
+              <a:rPr sz="2025" b="0">
                 <a:solidFill>
                   <a:srgbClr val="3D3D3D"/>
                 </a:solidFill>
@@ -13533,43 +13410,25 @@
                 <a:ea typeface="Pretendard"/>
                 <a:cs typeface="Pretendard"/>
               </a:rPr>
-              <a:t>Workers 3</a:t>
-            </a:r>
-          </a:p>
-          <a:p>
-            <a:pPr algn="ctr">
-              <a:lnSpc>
-                <a:spcPct val="146000"/>
-              </a:lnSpc>
-            </a:pPr>
-            <a:r>
-              <a:rPr sz="2100" b="0">
-                <a:solidFill>
-                  <a:srgbClr val="3D3D3D"/>
-                </a:solidFill>
-                <a:latin typeface="Pretendard"/>
-                <a:ea typeface="Pretendard"/>
-                <a:cs typeface="Pretendard"/>
-              </a:rPr>
-              <a:t>Cores 따라 변함</a:t>
-            </a:r>
-          </a:p>
-        </p:txBody>
-      </p:sp>
-      <p:sp>
-        <p:nvSpPr>
-          <p:cNvPr id="17" name="Rounded Rectangle 16"/>
-          <p:cNvSpPr/>
-          <p:nvPr/>
-        </p:nvSpPr>
-        <p:spPr>
-          <a:xfrm>
-            <a:off x="7696200" y="3924300"/>
-            <a:ext cx="2895600" cy="3143250"/>
+              <a:t>Alive 2 · Cores 4 Total — 지운 워커는 표에 DEAD 로 남는다</a:t>
+            </a:r>
+          </a:p>
+        </p:txBody>
+      </p:sp>
+      <p:sp>
+        <p:nvSpPr>
+          <p:cNvPr id="18" name="Rounded Rectangle 17"/>
+          <p:cNvSpPr/>
+          <p:nvPr/>
+        </p:nvSpPr>
+        <p:spPr>
+          <a:xfrm>
+            <a:off x="1143000" y="5467350"/>
+            <a:ext cx="11430000" cy="1095375"/>
           </a:xfrm>
           <a:prstGeom prst="roundRect">
             <a:avLst>
-              <a:gd name="adj" fmla="val 1644"/>
+              <a:gd name="adj" fmla="val 4347"/>
             </a:avLst>
           </a:prstGeom>
           <a:solidFill>
@@ -13592,16 +13451,16 @@
       </p:sp>
       <p:sp>
         <p:nvSpPr>
-          <p:cNvPr id="18" name="Rectangle 17"/>
-          <p:cNvSpPr/>
-          <p:nvPr/>
-        </p:nvSpPr>
-        <p:spPr>
-          <a:xfrm>
-            <a:off x="7696200" y="3924300"/>
-            <a:ext cx="2895600" cy="914400"/>
-          </a:xfrm>
-          <a:prstGeom prst="rect">
+          <p:cNvPr id="19" name="Oval 18"/>
+          <p:cNvSpPr/>
+          <p:nvPr/>
+        </p:nvSpPr>
+        <p:spPr>
+          <a:xfrm>
+            <a:off x="1447800" y="5715000"/>
+            <a:ext cx="590550" cy="590550"/>
+          </a:xfrm>
+          <a:prstGeom prst="ellipse">
             <a:avLst/>
           </a:prstGeom>
           <a:solidFill>
@@ -13622,14 +13481,14 @@
       </p:sp>
       <p:sp>
         <p:nvSpPr>
-          <p:cNvPr id="19" name="TextBox 18"/>
-          <p:cNvSpPr txBox="1"/>
-          <p:nvPr/>
-        </p:nvSpPr>
-        <p:spPr>
-          <a:xfrm>
-            <a:off x="7696200" y="4171950"/>
-            <a:ext cx="2895600" cy="419100"/>
+          <p:cNvPr id="20" name="TextBox 19"/>
+          <p:cNvSpPr txBox="1"/>
+          <p:nvPr/>
+        </p:nvSpPr>
+        <p:spPr>
+          <a:xfrm>
+            <a:off x="1447800" y="5867400"/>
+            <a:ext cx="590550" cy="323850"/>
           </a:xfrm>
           <a:prstGeom prst="rect">
             <a:avLst/>
@@ -13648,29 +13507,70 @@
               </a:lnSpc>
             </a:pPr>
             <a:r>
+              <a:rPr sz="2250" b="1">
+                <a:solidFill>
+                  <a:srgbClr val="FFFFFF"/>
+                </a:solidFill>
+                <a:latin typeface="Pretendard"/>
+                <a:ea typeface="Pretendard"/>
+                <a:cs typeface="Pretendard"/>
+              </a:rPr>
+              <a:t>3</a:t>
+            </a:r>
+          </a:p>
+        </p:txBody>
+      </p:sp>
+      <p:sp>
+        <p:nvSpPr>
+          <p:cNvPr id="21" name="TextBox 20"/>
+          <p:cNvSpPr txBox="1"/>
+          <p:nvPr/>
+        </p:nvSpPr>
+        <p:spPr>
+          <a:xfrm>
+            <a:off x="2324100" y="5676900"/>
+            <a:ext cx="9906000" cy="400050"/>
+          </a:xfrm>
+          <a:prstGeom prst="rect">
+            <a:avLst/>
+          </a:prstGeom>
+          <a:noFill/>
+        </p:spPr>
+        <p:txBody>
+          <a:bodyPr wrap="square" lIns="0" rIns="0" tIns="0" bIns="0" anchor="t">
+            <a:spAutoFit/>
+          </a:bodyPr>
+          <a:lstStyle/>
+          <a:p>
+            <a:pPr algn="l">
+              <a:lnSpc>
+                <a:spcPct val="110000"/>
+              </a:lnSpc>
+            </a:pPr>
+            <a:r>
               <a:rPr sz="2475" b="1">
                 <a:solidFill>
-                  <a:srgbClr val="FFFFFF"/>
-                </a:solidFill>
-                <a:latin typeface="Pretendard"/>
-                <a:ea typeface="Pretendard"/>
-                <a:cs typeface="Pretendard"/>
-              </a:rPr>
-              <a:t>과하게(실패)</a:t>
-            </a:r>
-          </a:p>
-        </p:txBody>
-      </p:sp>
-      <p:sp>
-        <p:nvSpPr>
-          <p:cNvPr id="20" name="TextBox 19"/>
-          <p:cNvSpPr txBox="1"/>
-          <p:nvPr/>
-        </p:nvSpPr>
-        <p:spPr>
-          <a:xfrm>
-            <a:off x="7905750" y="5143500"/>
-            <a:ext cx="2476500" cy="1524000"/>
+                  <a:srgbClr val="0D2B5E"/>
+                </a:solidFill>
+                <a:latin typeface="Pretendard"/>
+                <a:ea typeface="Pretendard"/>
+                <a:cs typeface="Pretendard"/>
+              </a:rPr>
+              <a:t>hostname 세 줄</a:t>
+            </a:r>
+          </a:p>
+        </p:txBody>
+      </p:sp>
+      <p:sp>
+        <p:nvSpPr>
+          <p:cNvPr id="22" name="TextBox 21"/>
+          <p:cNvSpPr txBox="1"/>
+          <p:nvPr/>
+        </p:nvSpPr>
+        <p:spPr>
+          <a:xfrm>
+            <a:off x="2324100" y="6076950"/>
+            <a:ext cx="9906000" cy="361950"/>
           </a:xfrm>
           <a:prstGeom prst="rect">
             <a:avLst/>
@@ -13683,13 +13583,13 @@
           </a:bodyPr>
           <a:lstStyle/>
           <a:p>
-            <a:pPr algn="ctr">
-              <a:lnSpc>
-                <a:spcPct val="146000"/>
-              </a:lnSpc>
-            </a:pPr>
-            <a:r>
-              <a:rPr sz="2100" b="0">
+            <a:pPr algn="l">
+              <a:lnSpc>
+                <a:spcPct val="120000"/>
+              </a:lnSpc>
+            </a:pPr>
+            <a:r>
+              <a:rPr sz="2025" b="0">
                 <a:solidFill>
                   <a:srgbClr val="3D3D3D"/>
                 </a:solidFill>
@@ -13697,51 +13597,33 @@
                 <a:ea typeface="Pretendard"/>
                 <a:cs typeface="Pretendard"/>
               </a:rPr>
-              <a:t>메모리 넘으면</a:t>
-            </a:r>
-          </a:p>
-          <a:p>
-            <a:pPr algn="ctr">
-              <a:lnSpc>
-                <a:spcPct val="146000"/>
-              </a:lnSpc>
-            </a:pPr>
-            <a:r>
-              <a:rPr sz="2100" b="0">
-                <a:solidFill>
-                  <a:srgbClr val="3D3D3D"/>
-                </a:solidFill>
-                <a:latin typeface="Pretendard"/>
-                <a:ea typeface="Pretendard"/>
-                <a:cs typeface="Pretendard"/>
-              </a:rPr>
-              <a:t>ps 에 Exited</a:t>
-            </a:r>
-          </a:p>
-        </p:txBody>
-      </p:sp>
-      <p:sp>
-        <p:nvSpPr>
-          <p:cNvPr id="21" name="Rounded Rectangle 20"/>
-          <p:cNvSpPr/>
-          <p:nvPr/>
-        </p:nvSpPr>
-        <p:spPr>
-          <a:xfrm>
-            <a:off x="10972800" y="3924300"/>
-            <a:ext cx="2895600" cy="3143250"/>
+              <a:t>마스터와 워커 둘이 서로 다른 12자리 — 컨테이너 ID 가 곧 호스트명</a:t>
+            </a:r>
+          </a:p>
+        </p:txBody>
+      </p:sp>
+      <p:sp>
+        <p:nvSpPr>
+          <p:cNvPr id="23" name="Rounded Rectangle 22"/>
+          <p:cNvSpPr/>
+          <p:nvPr/>
+        </p:nvSpPr>
+        <p:spPr>
+          <a:xfrm>
+            <a:off x="13144500" y="2933700"/>
+            <a:ext cx="4000500" cy="3629025"/>
           </a:xfrm>
           <a:prstGeom prst="roundRect">
             <a:avLst>
-              <a:gd name="adj" fmla="val 1644"/>
+              <a:gd name="adj" fmla="val 1312"/>
             </a:avLst>
           </a:prstGeom>
           <a:solidFill>
-            <a:srgbClr val="FAFBFD"/>
+            <a:srgbClr val="EDF3FD"/>
           </a:solidFill>
           <a:ln w="9525">
             <a:solidFill>
-              <a:srgbClr val="DCE1E8"/>
+              <a:srgbClr val="BFD3F5"/>
             </a:solidFill>
           </a:ln>
           <a:effectLst/>
@@ -13756,20 +13638,120 @@
       </p:sp>
       <p:sp>
         <p:nvSpPr>
-          <p:cNvPr id="22" name="Rectangle 21"/>
-          <p:cNvSpPr/>
-          <p:nvPr/>
-        </p:nvSpPr>
-        <p:spPr>
-          <a:xfrm>
-            <a:off x="10972800" y="3924300"/>
-            <a:ext cx="2895600" cy="914400"/>
-          </a:xfrm>
-          <a:prstGeom prst="rect">
-            <a:avLst/>
-          </a:prstGeom>
-          <a:solidFill>
-            <a:srgbClr val="1E5BC6"/>
+          <p:cNvPr id="24" name="TextBox 23"/>
+          <p:cNvSpPr txBox="1"/>
+          <p:nvPr/>
+        </p:nvSpPr>
+        <p:spPr>
+          <a:xfrm>
+            <a:off x="13487400" y="3929062"/>
+            <a:ext cx="3314700" cy="304800"/>
+          </a:xfrm>
+          <a:prstGeom prst="rect">
+            <a:avLst/>
+          </a:prstGeom>
+          <a:noFill/>
+        </p:spPr>
+        <p:txBody>
+          <a:bodyPr wrap="square" lIns="0" rIns="0" tIns="0" bIns="0" anchor="t">
+            <a:spAutoFit/>
+          </a:bodyPr>
+          <a:lstStyle/>
+          <a:p>
+            <a:pPr algn="l">
+              <a:lnSpc>
+                <a:spcPct val="100000"/>
+              </a:lnSpc>
+            </a:pPr>
+            <a:r>
+              <a:rPr sz="1800" b="1" spc="190">
+                <a:solidFill>
+                  <a:srgbClr val="1E5BC6"/>
+                </a:solidFill>
+                <a:latin typeface="Pretendard"/>
+                <a:ea typeface="Pretendard"/>
+                <a:cs typeface="Pretendard"/>
+              </a:rPr>
+              <a:t>DEAD 로 남은 워커</a:t>
+            </a:r>
+          </a:p>
+        </p:txBody>
+      </p:sp>
+      <p:sp>
+        <p:nvSpPr>
+          <p:cNvPr id="25" name="TextBox 24"/>
+          <p:cNvSpPr txBox="1"/>
+          <p:nvPr/>
+        </p:nvSpPr>
+        <p:spPr>
+          <a:xfrm>
+            <a:off x="13487400" y="4329112"/>
+            <a:ext cx="3314700" cy="1238250"/>
+          </a:xfrm>
+          <a:prstGeom prst="rect">
+            <a:avLst/>
+          </a:prstGeom>
+          <a:noFill/>
+        </p:spPr>
+        <p:txBody>
+          <a:bodyPr wrap="square" lIns="0" rIns="0" tIns="0" bIns="0" anchor="t">
+            <a:spAutoFit/>
+          </a:bodyPr>
+          <a:lstStyle/>
+          <a:p>
+            <a:pPr algn="l">
+              <a:lnSpc>
+                <a:spcPct val="138000"/>
+              </a:lnSpc>
+            </a:pPr>
+            <a:r>
+              <a:rPr sz="2700" b="1">
+                <a:solidFill>
+                  <a:srgbClr val="0D2B5E"/>
+                </a:solidFill>
+                <a:latin typeface="Pretendard"/>
+                <a:ea typeface="Pretendard"/>
+                <a:cs typeface="Pretendard"/>
+              </a:rPr>
+              <a:t>Alive 수에서만</a:t>
+            </a:r>
+          </a:p>
+          <a:p>
+            <a:pPr algn="l">
+              <a:lnSpc>
+                <a:spcPct val="138000"/>
+              </a:lnSpc>
+            </a:pPr>
+            <a:r>
+              <a:rPr sz="2700" b="1">
+                <a:solidFill>
+                  <a:srgbClr val="0D2B5E"/>
+                </a:solidFill>
+                <a:latin typeface="Pretendard"/>
+                <a:ea typeface="Pretendard"/>
+                <a:cs typeface="Pretendard"/>
+              </a:rPr>
+              <a:t>빠진다</a:t>
+            </a:r>
+          </a:p>
+        </p:txBody>
+      </p:sp>
+      <p:sp>
+        <p:nvSpPr>
+          <p:cNvPr id="26" name="Rectangle 25"/>
+          <p:cNvSpPr/>
+          <p:nvPr/>
+        </p:nvSpPr>
+        <p:spPr>
+          <a:xfrm>
+            <a:off x="1143000" y="8058150"/>
+            <a:ext cx="16002000" cy="9525"/>
+          </a:xfrm>
+          <a:prstGeom prst="rect">
+            <a:avLst/>
+          </a:prstGeom>
+          <a:solidFill>
+            <a:srgbClr val="DCE1E8"/>
           </a:solidFill>
           <a:ln>
             <a:noFill/>
@@ -13786,301 +13768,7 @@
       </p:sp>
       <p:sp>
         <p:nvSpPr>
-          <p:cNvPr id="23" name="TextBox 22"/>
-          <p:cNvSpPr txBox="1"/>
-          <p:nvPr/>
-        </p:nvSpPr>
-        <p:spPr>
-          <a:xfrm>
-            <a:off x="10972800" y="4171950"/>
-            <a:ext cx="2895600" cy="419100"/>
-          </a:xfrm>
-          <a:prstGeom prst="rect">
-            <a:avLst/>
-          </a:prstGeom>
-          <a:noFill/>
-        </p:spPr>
-        <p:txBody>
-          <a:bodyPr wrap="square" lIns="0" rIns="0" tIns="0" bIns="0" anchor="t">
-            <a:spAutoFit/>
-          </a:bodyPr>
-          <a:lstStyle/>
-          <a:p>
-            <a:pPr algn="ctr">
-              <a:lnSpc>
-                <a:spcPct val="100000"/>
-              </a:lnSpc>
-            </a:pPr>
-            <a:r>
-              <a:rPr sz="2475" b="1">
-                <a:solidFill>
-                  <a:srgbClr val="FFFFFF"/>
-                </a:solidFill>
-                <a:latin typeface="Pretendard"/>
-                <a:ea typeface="Pretendard"/>
-                <a:cs typeface="Pretendard"/>
-              </a:rPr>
-              <a:t>2개로</a:t>
-            </a:r>
-          </a:p>
-        </p:txBody>
-      </p:sp>
-      <p:sp>
-        <p:nvSpPr>
-          <p:cNvPr id="24" name="TextBox 23"/>
-          <p:cNvSpPr txBox="1"/>
-          <p:nvPr/>
-        </p:nvSpPr>
-        <p:spPr>
-          <a:xfrm>
-            <a:off x="11182350" y="5143500"/>
-            <a:ext cx="2476500" cy="1524000"/>
-          </a:xfrm>
-          <a:prstGeom prst="rect">
-            <a:avLst/>
-          </a:prstGeom>
-          <a:noFill/>
-        </p:spPr>
-        <p:txBody>
-          <a:bodyPr wrap="square" lIns="0" rIns="0" tIns="0" bIns="0" anchor="t">
-            <a:spAutoFit/>
-          </a:bodyPr>
-          <a:lstStyle/>
-          <a:p>
-            <a:pPr algn="ctr">
-              <a:lnSpc>
-                <a:spcPct val="146000"/>
-              </a:lnSpc>
-            </a:pPr>
-            <a:r>
-              <a:rPr sz="2100" b="0">
-                <a:solidFill>
-                  <a:srgbClr val="3D3D3D"/>
-                </a:solidFill>
-                <a:latin typeface="Pretendard"/>
-                <a:ea typeface="Pretendard"/>
-                <a:cs typeface="Pretendard"/>
-              </a:rPr>
-              <a:t>--scale</a:t>
-            </a:r>
-          </a:p>
-          <a:p>
-            <a:pPr algn="ctr">
-              <a:lnSpc>
-                <a:spcPct val="146000"/>
-              </a:lnSpc>
-            </a:pPr>
-            <a:r>
-              <a:rPr sz="2100" b="0">
-                <a:solidFill>
-                  <a:srgbClr val="3D3D3D"/>
-                </a:solidFill>
-                <a:latin typeface="Pretendard"/>
-                <a:ea typeface="Pretendard"/>
-                <a:cs typeface="Pretendard"/>
-              </a:rPr>
-              <a:t>spark-worker=2</a:t>
-            </a:r>
-          </a:p>
-        </p:txBody>
-      </p:sp>
-      <p:sp>
-        <p:nvSpPr>
-          <p:cNvPr id="25" name="Rounded Rectangle 24"/>
-          <p:cNvSpPr/>
-          <p:nvPr/>
-        </p:nvSpPr>
-        <p:spPr>
-          <a:xfrm>
-            <a:off x="14249400" y="3924300"/>
-            <a:ext cx="2895600" cy="3143250"/>
-          </a:xfrm>
-          <a:prstGeom prst="roundRect">
-            <a:avLst>
-              <a:gd name="adj" fmla="val 1644"/>
-            </a:avLst>
-          </a:prstGeom>
-          <a:solidFill>
-            <a:srgbClr val="FAFBFD"/>
-          </a:solidFill>
-          <a:ln w="9525">
-            <a:solidFill>
-              <a:srgbClr val="DCE1E8"/>
-            </a:solidFill>
-          </a:ln>
-          <a:effectLst/>
-        </p:spPr>
-        <p:txBody>
-          <a:bodyPr rtlCol="0" anchor="ctr" wrap="square"/>
-          <a:lstStyle/>
-          <a:p>
-            <a:pPr algn="ctr"/>
-          </a:p>
-        </p:txBody>
-      </p:sp>
-      <p:sp>
-        <p:nvSpPr>
-          <p:cNvPr id="26" name="Rectangle 25"/>
-          <p:cNvSpPr/>
-          <p:nvPr/>
-        </p:nvSpPr>
-        <p:spPr>
-          <a:xfrm>
-            <a:off x="14249400" y="3924300"/>
-            <a:ext cx="2895600" cy="914400"/>
-          </a:xfrm>
-          <a:prstGeom prst="rect">
-            <a:avLst/>
-          </a:prstGeom>
-          <a:solidFill>
-            <a:srgbClr val="0D2B5E"/>
-          </a:solidFill>
-          <a:ln>
-            <a:noFill/>
-          </a:ln>
-          <a:effectLst/>
-        </p:spPr>
-        <p:txBody>
-          <a:bodyPr rtlCol="0" anchor="ctr" wrap="square"/>
-          <a:lstStyle/>
-          <a:p>
-            <a:pPr algn="ctr"/>
-          </a:p>
-        </p:txBody>
-      </p:sp>
-      <p:sp>
-        <p:nvSpPr>
           <p:cNvPr id="27" name="TextBox 26"/>
-          <p:cNvSpPr txBox="1"/>
-          <p:nvPr/>
-        </p:nvSpPr>
-        <p:spPr>
-          <a:xfrm>
-            <a:off x="14249400" y="4171950"/>
-            <a:ext cx="2895600" cy="419100"/>
-          </a:xfrm>
-          <a:prstGeom prst="rect">
-            <a:avLst/>
-          </a:prstGeom>
-          <a:noFill/>
-        </p:spPr>
-        <p:txBody>
-          <a:bodyPr wrap="square" lIns="0" rIns="0" tIns="0" bIns="0" anchor="t">
-            <a:spAutoFit/>
-          </a:bodyPr>
-          <a:lstStyle/>
-          <a:p>
-            <a:pPr algn="ctr">
-              <a:lnSpc>
-                <a:spcPct val="100000"/>
-              </a:lnSpc>
-            </a:pPr>
-            <a:r>
-              <a:rPr sz="2475" b="1">
-                <a:solidFill>
-                  <a:srgbClr val="FFFFFF"/>
-                </a:solidFill>
-                <a:latin typeface="Pretendard"/>
-                <a:ea typeface="Pretendard"/>
-                <a:cs typeface="Pretendard"/>
-              </a:rPr>
-              <a:t>hostname</a:t>
-            </a:r>
-          </a:p>
-        </p:txBody>
-      </p:sp>
-      <p:sp>
-        <p:nvSpPr>
-          <p:cNvPr id="28" name="TextBox 27"/>
-          <p:cNvSpPr txBox="1"/>
-          <p:nvPr/>
-        </p:nvSpPr>
-        <p:spPr>
-          <a:xfrm>
-            <a:off x="14458950" y="5143500"/>
-            <a:ext cx="2476500" cy="1524000"/>
-          </a:xfrm>
-          <a:prstGeom prst="rect">
-            <a:avLst/>
-          </a:prstGeom>
-          <a:noFill/>
-        </p:spPr>
-        <p:txBody>
-          <a:bodyPr wrap="square" lIns="0" rIns="0" tIns="0" bIns="0" anchor="t">
-            <a:spAutoFit/>
-          </a:bodyPr>
-          <a:lstStyle/>
-          <a:p>
-            <a:pPr algn="ctr">
-              <a:lnSpc>
-                <a:spcPct val="146000"/>
-              </a:lnSpc>
-            </a:pPr>
-            <a:r>
-              <a:rPr sz="2100" b="0">
-                <a:solidFill>
-                  <a:srgbClr val="3D3D3D"/>
-                </a:solidFill>
-                <a:latin typeface="Pretendard"/>
-                <a:ea typeface="Pretendard"/>
-                <a:cs typeface="Pretendard"/>
-              </a:rPr>
-              <a:t>마스터·워커</a:t>
-            </a:r>
-          </a:p>
-          <a:p>
-            <a:pPr algn="ctr">
-              <a:lnSpc>
-                <a:spcPct val="146000"/>
-              </a:lnSpc>
-            </a:pPr>
-            <a:r>
-              <a:rPr sz="2100" b="0">
-                <a:solidFill>
-                  <a:srgbClr val="3D3D3D"/>
-                </a:solidFill>
-                <a:latin typeface="Pretendard"/>
-                <a:ea typeface="Pretendard"/>
-                <a:cs typeface="Pretendard"/>
-              </a:rPr>
-              <a:t>이름이 다르다</a:t>
-            </a:r>
-          </a:p>
-        </p:txBody>
-      </p:sp>
-      <p:sp>
-        <p:nvSpPr>
-          <p:cNvPr id="29" name="Rectangle 28"/>
-          <p:cNvSpPr/>
-          <p:nvPr/>
-        </p:nvSpPr>
-        <p:spPr>
-          <a:xfrm>
-            <a:off x="1143000" y="8058150"/>
-            <a:ext cx="16002000" cy="9525"/>
-          </a:xfrm>
-          <a:prstGeom prst="rect">
-            <a:avLst/>
-          </a:prstGeom>
-          <a:solidFill>
-            <a:srgbClr val="DCE1E8"/>
-          </a:solidFill>
-          <a:ln>
-            <a:noFill/>
-          </a:ln>
-          <a:effectLst/>
-        </p:spPr>
-        <p:txBody>
-          <a:bodyPr rtlCol="0" anchor="ctr" wrap="square"/>
-          <a:lstStyle/>
-          <a:p>
-            <a:pPr algn="ctr"/>
-          </a:p>
-        </p:txBody>
-      </p:sp>
-      <p:sp>
-        <p:nvSpPr>
-          <p:cNvPr id="30" name="TextBox 29"/>
           <p:cNvSpPr txBox="1"/>
           <p:nvPr/>
         </p:nvSpPr>
@@ -14121,7 +13809,7 @@
       </p:sp>
       <p:sp>
         <p:nvSpPr>
-          <p:cNvPr id="31" name="TextBox 30"/>
+          <p:cNvPr id="28" name="TextBox 27"/>
           <p:cNvSpPr txBox="1"/>
           <p:nvPr/>
         </p:nvSpPr>
@@ -14180,7 +13868,7 @@
       <p:grpSpPr/>
       <p:sp>
         <p:nvSpPr>
-          <p:cNvPr id="2" name="Oval 1"/>
+          <p:cNvPr id="2" name="deckgen:decor"/>
           <p:cNvSpPr/>
           <p:nvPr/>
         </p:nvSpPr>
@@ -14210,7 +13898,7 @@
       </p:sp>
       <p:sp>
         <p:nvSpPr>
-          <p:cNvPr id="3" name="Oval 2"/>
+          <p:cNvPr id="3" name="deckgen:decor"/>
           <p:cNvSpPr/>
           <p:nvPr/>
         </p:nvSpPr>
@@ -14240,7 +13928,7 @@
       </p:sp>
       <p:sp>
         <p:nvSpPr>
-          <p:cNvPr id="4" name="Oval 3"/>
+          <p:cNvPr id="4" name="deckgen:decor"/>
           <p:cNvSpPr/>
           <p:nvPr/>
         </p:nvSpPr>
@@ -14304,7 +13992,7 @@
                 <a:ea typeface="Pretendard"/>
                 <a:cs typeface="Pretendard"/>
               </a:rPr>
-              <a:t>6단계 — 일부러 실패시키기</a:t>
+              <a:t>8단계 — 일부러 실패시키기</a:t>
             </a:r>
           </a:p>
         </p:txBody>
@@ -14345,7 +14033,7 @@
                 <a:ea typeface="Pretendard"/>
                 <a:cs typeface="Pretendard"/>
               </a:rPr>
-              <a:t>같은 --scale 인데 — 뜨는 것과 죽는 것</a:t>
+              <a:t>마스터를 껐다 켜면 — 워커는 스스로 돌아온다</a:t>
             </a:r>
           </a:p>
         </p:txBody>
@@ -14416,7 +14104,7 @@
                 <a:ea typeface="Pretendard"/>
                 <a:cs typeface="Pretendard"/>
               </a:rPr>
-              <a:t>워커 2 → 3 — 정상</a:t>
+              <a:t>stop spark-master — 실패</a:t>
             </a:r>
           </a:p>
         </p:txBody>
@@ -14457,7 +14145,7 @@
                 <a:ea typeface="Pretendard"/>
                 <a:cs typeface="Pretendard"/>
               </a:rPr>
-              <a:t>UI 의 Workers 수와 Cores in use 가 따라 는다</a:t>
+              <a:t>워커는 죽지 않고 마스터를 계속 다시 찾는다</a:t>
             </a:r>
           </a:p>
         </p:txBody>
@@ -14562,7 +14250,7 @@
                 <a:ea typeface="Pretendard"/>
                 <a:cs typeface="Pretendard"/>
               </a:rPr>
-              <a:t>--scale 3</a:t>
+              <a:t>compose stop</a:t>
             </a:r>
           </a:p>
         </p:txBody>
@@ -14629,7 +14317,7 @@
               </a:lnSpc>
             </a:pPr>
             <a:r>
-              <a:rPr sz="1500" b="0">
+              <a:rPr sz="1350" b="0">
                 <a:solidFill>
                   <a:srgbClr val="3D3D3D"/>
                 </a:solidFill>
@@ -14637,7 +14325,7 @@
                 <a:ea typeface="Pretendard"/>
                 <a:cs typeface="Pretendard"/>
               </a:rPr>
-              <a:t>up -d</a:t>
+              <a:t>sleep 15</a:t>
             </a:r>
           </a:p>
         </p:txBody>
@@ -14738,7 +14426,7 @@
                 <a:ea typeface="Pretendard"/>
                 <a:cs typeface="Pretendard"/>
               </a:rPr>
-              <a:t>ps 모두 Up</a:t>
+              <a:t>마스터 UI 000</a:t>
             </a:r>
           </a:p>
         </p:txBody>
@@ -14805,7 +14493,7 @@
               </a:lnSpc>
             </a:pPr>
             <a:r>
-              <a:rPr sz="1500" b="0">
+              <a:rPr sz="1350" b="0">
                 <a:solidFill>
                   <a:srgbClr val="3D3D3D"/>
                 </a:solidFill>
@@ -14813,7 +14501,7 @@
                 <a:ea typeface="Pretendard"/>
                 <a:cs typeface="Pretendard"/>
               </a:rPr>
-              <a:t>새 워커 등록</a:t>
+              <a:t>접속 안 됨</a:t>
             </a:r>
           </a:p>
         </p:txBody>
@@ -14914,7 +14602,7 @@
                 <a:ea typeface="Pretendard"/>
                 <a:cs typeface="Pretendard"/>
               </a:rPr>
-              <a:t>UI Workers 3</a:t>
+              <a:t>워커 로그</a:t>
             </a:r>
           </a:p>
         </p:txBody>
@@ -14981,7 +14669,7 @@
               </a:lnSpc>
             </a:pPr>
             <a:r>
-              <a:rPr sz="1500" b="0">
+              <a:rPr sz="1350" b="0">
                 <a:solidFill>
                   <a:srgbClr val="3D3D3D"/>
                 </a:solidFill>
@@ -14989,7 +14677,25 @@
                 <a:ea typeface="Pretendard"/>
                 <a:cs typeface="Pretendard"/>
               </a:rPr>
-              <a:t>줄이면 DEAD 뒤 사라짐</a:t>
+              <a:t>Connection refused</a:t>
+            </a:r>
+          </a:p>
+          <a:p>
+            <a:pPr algn="ctr">
+              <a:lnSpc>
+                <a:spcPct val="135000"/>
+              </a:lnSpc>
+            </a:pPr>
+            <a:r>
+              <a:rPr sz="1350" b="0">
+                <a:solidFill>
+                  <a:srgbClr val="3D3D3D"/>
+                </a:solidFill>
+                <a:latin typeface="Pretendard"/>
+                <a:ea typeface="Pretendard"/>
+                <a:cs typeface="Pretendard"/>
+              </a:rPr>
+              <a:t>Retrying (attempt # N)</a:t>
             </a:r>
           </a:p>
         </p:txBody>
@@ -15030,7 +14736,7 @@
                 <a:ea typeface="Pretendard"/>
                 <a:cs typeface="Pretendard"/>
               </a:rPr>
-              <a:t>메모리 초과 — 뜨자마자 죽음</a:t>
+              <a:t>start spark-master — 복구</a:t>
             </a:r>
           </a:p>
         </p:txBody>
@@ -15071,7 +14777,7 @@
                 <a:ea typeface="Pretendard"/>
                 <a:cs typeface="Pretendard"/>
               </a:rPr>
-              <a:t>Docker 에 할당된 메모리를 넘으면 컨테이너가 죽는다</a:t>
+              <a:t>손대지 않아도 30초 안에 워커가 다시 등록</a:t>
             </a:r>
           </a:p>
         </p:txBody>
@@ -15176,7 +14882,7 @@
                 <a:ea typeface="Pretendard"/>
                 <a:cs typeface="Pretendard"/>
               </a:rPr>
-              <a:t>--scale 크게</a:t>
+              <a:t>compose start</a:t>
             </a:r>
           </a:p>
         </p:txBody>
@@ -15251,7 +14957,7 @@
                 <a:ea typeface="Pretendard"/>
                 <a:cs typeface="Pretendard"/>
               </a:rPr>
-              <a:t>메모리 넘김</a:t>
+              <a:t>sleep 30</a:t>
             </a:r>
           </a:p>
         </p:txBody>
@@ -15352,7 +15058,7 @@
                 <a:ea typeface="Pretendard"/>
                 <a:cs typeface="Pretendard"/>
               </a:rPr>
-              <a:t>ps 에 Exited</a:t>
+              <a:t>재등록 7초 · 21초</a:t>
             </a:r>
           </a:p>
         </p:txBody>
@@ -15427,7 +15133,7 @@
                 <a:ea typeface="Pretendard"/>
                 <a:cs typeface="Pretendard"/>
               </a:rPr>
-              <a:t>뜨자마자 죽음</a:t>
+              <a:t>워커마다 간격 다름</a:t>
             </a:r>
           </a:p>
         </p:txBody>
@@ -15528,7 +15234,7 @@
                 <a:ea typeface="Pretendard"/>
                 <a:cs typeface="Pretendard"/>
               </a:rPr>
-              <a:t>logs → 수 줄이기</a:t>
+              <a:t>마스터 UI 200</a:t>
             </a:r>
           </a:p>
         </p:txBody>
@@ -15603,7 +15309,7 @@
                 <a:ea typeface="Pretendard"/>
                 <a:cs typeface="Pretendard"/>
               </a:rPr>
-              <a:t>16GB 는 1~2개</a:t>
+              <a:t>ALIVE 두 줄</a:t>
             </a:r>
           </a:p>
         </p:txBody>
